--- a/docs/diagrams/Multilingual-Translation-Studio-Backend-Architecture.pptx
+++ b/docs/diagrams/Multilingual-Translation-Studio-Backend-Architecture.pptx
@@ -3162,7 +3162,7 @@
                 </a:solidFill>
                 <a:latin typeface="Calibri"/>
               </a:rPr>
-              <a:t>SA - Multilingual Translation Studio (Backend)</a:t>
+              <a:t>SA - CareTranslate Studio (Azure Backend)</a:t>
             </a:r>
           </a:p>
         </p:txBody>
@@ -3551,8 +3551,8 @@
         </p:nvSpPr>
         <p:spPr>
           <a:xfrm>
-            <a:off x="411480" y="2240280"/>
-            <a:ext cx="1737360" cy="640080"/>
+            <a:off x="320040" y="2377440"/>
+            <a:ext cx="1920240" cy="777240"/>
           </a:xfrm>
           <a:prstGeom prst="roundRect">
             <a:avLst>
@@ -3605,8 +3605,8 @@
         </p:nvSpPr>
         <p:spPr>
           <a:xfrm>
-            <a:off x="521208" y="2313432"/>
-            <a:ext cx="1536192" cy="530352"/>
+            <a:off x="429768" y="2450592"/>
+            <a:ext cx="1719072" cy="667512"/>
           </a:xfrm>
           <a:prstGeom prst="rect">
             <a:avLst/>
@@ -3620,13 +3620,13 @@
           <a:lstStyle/>
           <a:p>
             <a:r>
-              <a:rPr sz="1200" b="1">
+              <a:rPr sz="1100" b="1">
                 <a:solidFill>
                   <a:srgbClr val="222222"/>
                 </a:solidFill>
                 <a:latin typeface="Calibri"/>
               </a:rPr>
-              <a:t>F5</a:t>
+              <a:t>Azure Front Door Premium (WAF)</a:t>
             </a:r>
           </a:p>
           <a:p>
@@ -3637,7 +3637,7 @@
                 </a:solidFill>
                 <a:latin typeface="Calibri"/>
               </a:rPr>
-              <a:t>Load balancer</a:t>
+              <a:t>TLS · WAF · routing</a:t>
             </a:r>
           </a:p>
         </p:txBody>
@@ -3650,8 +3650,395 @@
         </p:nvSpPr>
         <p:spPr>
           <a:xfrm>
-            <a:off x="320040" y="3108960"/>
-            <a:ext cx="1920240" cy="777240"/>
+            <a:off x="2514600" y="731520"/>
+            <a:ext cx="5029200" cy="4297680"/>
+          </a:xfrm>
+          <a:prstGeom prst="roundRect">
+            <a:avLst>
+              <a:gd name="adj" fmla="val 4000"/>
+            </a:avLst>
+          </a:prstGeom>
+          <a:solidFill>
+            <a:srgbClr val="FFFFFF"/>
+          </a:solidFill>
+          <a:ln w="22225">
+            <a:solidFill>
+              <a:srgbClr val="888888"/>
+            </a:solidFill>
+          </a:ln>
+          <a:effectLst>
+            <a:outerShdw blurRad="50800" dist="38100" dir="2700000" algn="tl" rotWithShape="0">
+              <a:srgbClr val="000000">
+                <a:alpha val="20000"/>
+              </a:srgbClr>
+            </a:outerShdw>
+          </a:effectLst>
+        </p:spPr>
+        <p:style>
+          <a:lnRef idx="1">
+            <a:schemeClr val="accent1"/>
+          </a:lnRef>
+          <a:fillRef idx="3">
+            <a:schemeClr val="accent1"/>
+          </a:fillRef>
+          <a:effectRef idx="2">
+            <a:schemeClr val="accent1"/>
+          </a:effectRef>
+          <a:fontRef idx="minor">
+            <a:schemeClr val="lt1"/>
+          </a:fontRef>
+        </p:style>
+        <p:txBody>
+          <a:bodyPr rtlCol="0" anchor="ctr"/>
+          <a:lstStyle/>
+          <a:p>
+            <a:pPr algn="ctr"/>
+          </a:p>
+        </p:txBody>
+      </p:sp>
+      <p:sp>
+        <p:nvSpPr>
+          <p:cNvPr id="13" name="TextBox 12"/>
+          <p:cNvSpPr txBox="1"/>
+          <p:nvPr/>
+        </p:nvSpPr>
+        <p:spPr>
+          <a:xfrm>
+            <a:off x="2697480" y="822960"/>
+            <a:ext cx="4572000" cy="274320"/>
+          </a:xfrm>
+          <a:prstGeom prst="rect">
+            <a:avLst/>
+          </a:prstGeom>
+          <a:noFill/>
+        </p:spPr>
+        <p:txBody>
+          <a:bodyPr wrap="square">
+            <a:spAutoFit/>
+          </a:bodyPr>
+          <a:lstStyle/>
+          <a:p>
+            <a:r>
+              <a:rPr sz="1300" b="1">
+                <a:solidFill>
+                  <a:srgbClr val="1F2A44"/>
+                </a:solidFill>
+                <a:latin typeface="Calibri"/>
+              </a:rPr>
+              <a:t>Backend Environment (CAT 3)</a:t>
+            </a:r>
+          </a:p>
+        </p:txBody>
+      </p:sp>
+      <p:sp>
+        <p:nvSpPr>
+          <p:cNvPr id="14" name="Rounded Rectangle 13"/>
+          <p:cNvSpPr/>
+          <p:nvPr/>
+        </p:nvSpPr>
+        <p:spPr>
+          <a:xfrm>
+            <a:off x="2697480" y="1143000"/>
+            <a:ext cx="4663440" cy="960120"/>
+          </a:xfrm>
+          <a:prstGeom prst="roundRect">
+            <a:avLst>
+              <a:gd name="adj" fmla="val 10000"/>
+            </a:avLst>
+          </a:prstGeom>
+          <a:solidFill>
+            <a:srgbClr val="FBF3E0"/>
+          </a:solidFill>
+          <a:ln w="15875">
+            <a:solidFill>
+              <a:srgbClr val="C9B88E"/>
+            </a:solidFill>
+          </a:ln>
+          <a:effectLst>
+            <a:outerShdw blurRad="50800" dist="38100" dir="2700000" algn="tl" rotWithShape="0">
+              <a:srgbClr val="000000">
+                <a:alpha val="20000"/>
+              </a:srgbClr>
+            </a:outerShdw>
+          </a:effectLst>
+        </p:spPr>
+        <p:style>
+          <a:lnRef idx="1">
+            <a:schemeClr val="accent1"/>
+          </a:lnRef>
+          <a:fillRef idx="3">
+            <a:schemeClr val="accent1"/>
+          </a:fillRef>
+          <a:effectRef idx="2">
+            <a:schemeClr val="accent1"/>
+          </a:effectRef>
+          <a:fontRef idx="minor">
+            <a:schemeClr val="lt1"/>
+          </a:fontRef>
+        </p:style>
+        <p:txBody>
+          <a:bodyPr rtlCol="0" anchor="ctr"/>
+          <a:lstStyle/>
+          <a:p>
+            <a:pPr algn="ctr"/>
+          </a:p>
+        </p:txBody>
+      </p:sp>
+      <p:sp>
+        <p:nvSpPr>
+          <p:cNvPr id="15" name="TextBox 14"/>
+          <p:cNvSpPr txBox="1"/>
+          <p:nvPr/>
+        </p:nvSpPr>
+        <p:spPr>
+          <a:xfrm>
+            <a:off x="2807208" y="1216152"/>
+            <a:ext cx="4462272" cy="850392"/>
+          </a:xfrm>
+          <a:prstGeom prst="rect">
+            <a:avLst/>
+          </a:prstGeom>
+          <a:noFill/>
+        </p:spPr>
+        <p:txBody>
+          <a:bodyPr wrap="square">
+            <a:spAutoFit/>
+          </a:bodyPr>
+          <a:lstStyle/>
+          <a:p>
+            <a:r>
+              <a:rPr sz="1200" b="1">
+                <a:solidFill>
+                  <a:srgbClr val="222222"/>
+                </a:solidFill>
+                <a:latin typeface="Calibri"/>
+              </a:rPr>
+              <a:t>NS1 · API Gateway Services</a:t>
+            </a:r>
+          </a:p>
+          <a:p>
+            <a:r>
+              <a:rPr sz="900">
+                <a:solidFill>
+                  <a:srgbClr val="222222"/>
+                </a:solidFill>
+                <a:latin typeface="Calibri"/>
+              </a:rPr>
+              <a:t>FastAPI /api/v1 · Upload · Status · Pages · Cancel/Retry · Downloads · JWT</a:t>
+            </a:r>
+          </a:p>
+        </p:txBody>
+      </p:sp>
+      <p:sp>
+        <p:nvSpPr>
+          <p:cNvPr id="16" name="Rounded Rectangle 15"/>
+          <p:cNvSpPr/>
+          <p:nvPr/>
+        </p:nvSpPr>
+        <p:spPr>
+          <a:xfrm>
+            <a:off x="2697480" y="2240280"/>
+            <a:ext cx="4663440" cy="1417320"/>
+          </a:xfrm>
+          <a:prstGeom prst="roundRect">
+            <a:avLst>
+              <a:gd name="adj" fmla="val 10000"/>
+            </a:avLst>
+          </a:prstGeom>
+          <a:solidFill>
+            <a:srgbClr val="FBF3E0"/>
+          </a:solidFill>
+          <a:ln w="15875">
+            <a:solidFill>
+              <a:srgbClr val="C9B88E"/>
+            </a:solidFill>
+          </a:ln>
+          <a:effectLst>
+            <a:outerShdw blurRad="50800" dist="38100" dir="2700000" algn="tl" rotWithShape="0">
+              <a:srgbClr val="000000">
+                <a:alpha val="20000"/>
+              </a:srgbClr>
+            </a:outerShdw>
+          </a:effectLst>
+        </p:spPr>
+        <p:style>
+          <a:lnRef idx="1">
+            <a:schemeClr val="accent1"/>
+          </a:lnRef>
+          <a:fillRef idx="3">
+            <a:schemeClr val="accent1"/>
+          </a:fillRef>
+          <a:effectRef idx="2">
+            <a:schemeClr val="accent1"/>
+          </a:effectRef>
+          <a:fontRef idx="minor">
+            <a:schemeClr val="lt1"/>
+          </a:fontRef>
+        </p:style>
+        <p:txBody>
+          <a:bodyPr rtlCol="0" anchor="ctr"/>
+          <a:lstStyle/>
+          <a:p>
+            <a:pPr algn="ctr"/>
+          </a:p>
+        </p:txBody>
+      </p:sp>
+      <p:sp>
+        <p:nvSpPr>
+          <p:cNvPr id="17" name="TextBox 16"/>
+          <p:cNvSpPr txBox="1"/>
+          <p:nvPr/>
+        </p:nvSpPr>
+        <p:spPr>
+          <a:xfrm>
+            <a:off x="2807208" y="2313432"/>
+            <a:ext cx="4462272" cy="1307592"/>
+          </a:xfrm>
+          <a:prstGeom prst="rect">
+            <a:avLst/>
+          </a:prstGeom>
+          <a:noFill/>
+        </p:spPr>
+        <p:txBody>
+          <a:bodyPr wrap="square">
+            <a:spAutoFit/>
+          </a:bodyPr>
+          <a:lstStyle/>
+          <a:p>
+            <a:r>
+              <a:rPr sz="1200" b="1">
+                <a:solidFill>
+                  <a:srgbClr val="222222"/>
+                </a:solidFill>
+                <a:latin typeface="Calibri"/>
+              </a:rPr>
+              <a:t>NS2 · Orchestrator &amp; Processing</a:t>
+            </a:r>
+          </a:p>
+          <a:p>
+            <a:r>
+              <a:rPr sz="900">
+                <a:solidFill>
+                  <a:srgbClr val="222222"/>
+                </a:solidFill>
+                <a:latin typeface="Calibri"/>
+              </a:rPr>
+              <a:t>Intake/Extract -&gt; Gateway/Profiles -&gt; Translate -&gt; Export
+Implemented: GENAI_PSEUDONYMIZED, GENAI_SYNTHETIC_POC, GENAI_RAW_EXCEPTION, MANAGED_NO_LLM, BLOCKED
+Proposed: RESTRICTED_LOCAL, HUMAN_ONLY</a:t>
+            </a:r>
+          </a:p>
+        </p:txBody>
+      </p:sp>
+      <p:sp>
+        <p:nvSpPr>
+          <p:cNvPr id="18" name="Rounded Rectangle 17"/>
+          <p:cNvSpPr/>
+          <p:nvPr/>
+        </p:nvSpPr>
+        <p:spPr>
+          <a:xfrm>
+            <a:off x="2697480" y="3794760"/>
+            <a:ext cx="4663440" cy="1051560"/>
+          </a:xfrm>
+          <a:prstGeom prst="roundRect">
+            <a:avLst>
+              <a:gd name="adj" fmla="val 10000"/>
+            </a:avLst>
+          </a:prstGeom>
+          <a:solidFill>
+            <a:srgbClr val="FBF3E0"/>
+          </a:solidFill>
+          <a:ln w="15875">
+            <a:solidFill>
+              <a:srgbClr val="C9B88E"/>
+            </a:solidFill>
+          </a:ln>
+          <a:effectLst>
+            <a:outerShdw blurRad="50800" dist="38100" dir="2700000" algn="tl" rotWithShape="0">
+              <a:srgbClr val="000000">
+                <a:alpha val="20000"/>
+              </a:srgbClr>
+            </a:outerShdw>
+          </a:effectLst>
+        </p:spPr>
+        <p:style>
+          <a:lnRef idx="1">
+            <a:schemeClr val="accent1"/>
+          </a:lnRef>
+          <a:fillRef idx="3">
+            <a:schemeClr val="accent1"/>
+          </a:fillRef>
+          <a:effectRef idx="2">
+            <a:schemeClr val="accent1"/>
+          </a:effectRef>
+          <a:fontRef idx="minor">
+            <a:schemeClr val="lt1"/>
+          </a:fontRef>
+        </p:style>
+        <p:txBody>
+          <a:bodyPr rtlCol="0" anchor="ctr"/>
+          <a:lstStyle/>
+          <a:p>
+            <a:pPr algn="ctr"/>
+          </a:p>
+        </p:txBody>
+      </p:sp>
+      <p:sp>
+        <p:nvSpPr>
+          <p:cNvPr id="19" name="TextBox 18"/>
+          <p:cNvSpPr txBox="1"/>
+          <p:nvPr/>
+        </p:nvSpPr>
+        <p:spPr>
+          <a:xfrm>
+            <a:off x="2807208" y="3867912"/>
+            <a:ext cx="4462272" cy="941832"/>
+          </a:xfrm>
+          <a:prstGeom prst="rect">
+            <a:avLst/>
+          </a:prstGeom>
+          <a:noFill/>
+        </p:spPr>
+        <p:txBody>
+          <a:bodyPr wrap="square">
+            <a:spAutoFit/>
+          </a:bodyPr>
+          <a:lstStyle/>
+          <a:p>
+            <a:r>
+              <a:rPr sz="1200" b="1">
+                <a:solidFill>
+                  <a:srgbClr val="222222"/>
+                </a:solidFill>
+                <a:latin typeface="Calibri"/>
+              </a:rPr>
+              <a:t>NS3 · Workers &amp; Agents</a:t>
+            </a:r>
+          </a:p>
+          <a:p>
+            <a:r>
+              <a:rPr sz="900">
+                <a:solidFill>
+                  <a:srgbClr val="222222"/>
+                </a:solidFill>
+                <a:latin typeface="Calibri"/>
+              </a:rPr>
+              <a:t>Page-range DI worker · Translation worker · Retention · Prompt library · Token service</a:t>
+            </a:r>
+          </a:p>
+        </p:txBody>
+      </p:sp>
+      <p:sp>
+        <p:nvSpPr>
+          <p:cNvPr id="20" name="Rounded Rectangle 19"/>
+          <p:cNvSpPr/>
+          <p:nvPr/>
+        </p:nvSpPr>
+        <p:spPr>
+          <a:xfrm>
+            <a:off x="7818120" y="777240"/>
+            <a:ext cx="1371600" cy="640080"/>
           </a:xfrm>
           <a:prstGeom prst="roundRect">
             <a:avLst>
@@ -3696,40 +4083,16 @@
           </a:p>
         </p:txBody>
       </p:sp>
-      <p:pic>
-        <p:nvPicPr>
-          <p:cNvPr id="13" name="Picture 12" descr="app-gateway.png"/>
-          <p:cNvPicPr>
-            <a:picLocks noChangeAspect="1"/>
-          </p:cNvPicPr>
-          <p:nvPr/>
-        </p:nvPicPr>
-        <p:blipFill>
-          <a:blip r:embed="rId2"/>
-          <a:stretch>
-            <a:fillRect/>
-          </a:stretch>
-        </p:blipFill>
-        <p:spPr>
-          <a:xfrm>
-            <a:off x="411480" y="3218688"/>
-            <a:ext cx="347472" cy="347472"/>
-          </a:xfrm>
-          <a:prstGeom prst="rect">
-            <a:avLst/>
-          </a:prstGeom>
-        </p:spPr>
-      </p:pic>
-      <p:sp>
-        <p:nvSpPr>
-          <p:cNvPr id="14" name="TextBox 13"/>
+      <p:sp>
+        <p:nvSpPr>
+          <p:cNvPr id="21" name="TextBox 20"/>
           <p:cNvSpPr txBox="1"/>
           <p:nvPr/>
         </p:nvSpPr>
         <p:spPr>
           <a:xfrm>
-            <a:off x="822960" y="3182112"/>
-            <a:ext cx="1325880" cy="667512"/>
+            <a:off x="7927848" y="850392"/>
+            <a:ext cx="1170432" cy="530352"/>
           </a:xfrm>
           <a:prstGeom prst="rect">
             <a:avLst/>
@@ -3743,496 +4106,38 @@
           <a:lstStyle/>
           <a:p>
             <a:r>
-              <a:rPr sz="1200" b="1">
+              <a:rPr sz="1100" b="1">
                 <a:solidFill>
                   <a:srgbClr val="222222"/>
                 </a:solidFill>
                 <a:latin typeface="Calibri"/>
               </a:rPr>
-              <a:t>App Gateway</a:t>
-            </a:r>
-          </a:p>
-          <a:p>
-            <a:r>
-              <a:rPr sz="900">
+              <a:t>APIM</a:t>
+            </a:r>
+          </a:p>
+          <a:p>
+            <a:r>
+              <a:rPr sz="800">
                 <a:solidFill>
                   <a:srgbClr val="222222"/>
                 </a:solidFill>
                 <a:latin typeface="Calibri"/>
               </a:rPr>
-              <a:t>TLS · WAF · routing</a:t>
-            </a:r>
-          </a:p>
-        </p:txBody>
-      </p:sp>
-      <p:sp>
-        <p:nvSpPr>
-          <p:cNvPr id="15" name="Rounded Rectangle 14"/>
+              <a:t>JWT · throttle</a:t>
+            </a:r>
+          </a:p>
+        </p:txBody>
+      </p:sp>
+      <p:sp>
+        <p:nvSpPr>
+          <p:cNvPr id="22" name="Rounded Rectangle 21"/>
           <p:cNvSpPr/>
           <p:nvPr/>
         </p:nvSpPr>
         <p:spPr>
           <a:xfrm>
-            <a:off x="2514600" y="731520"/>
-            <a:ext cx="5029200" cy="4297680"/>
-          </a:xfrm>
-          <a:prstGeom prst="roundRect">
-            <a:avLst>
-              <a:gd name="adj" fmla="val 4000"/>
-            </a:avLst>
-          </a:prstGeom>
-          <a:solidFill>
-            <a:srgbClr val="FFFFFF"/>
-          </a:solidFill>
-          <a:ln w="22225">
-            <a:solidFill>
-              <a:srgbClr val="888888"/>
-            </a:solidFill>
-          </a:ln>
-          <a:effectLst>
-            <a:outerShdw blurRad="50800" dist="38100" dir="2700000" algn="tl" rotWithShape="0">
-              <a:srgbClr val="000000">
-                <a:alpha val="20000"/>
-              </a:srgbClr>
-            </a:outerShdw>
-          </a:effectLst>
-        </p:spPr>
-        <p:style>
-          <a:lnRef idx="1">
-            <a:schemeClr val="accent1"/>
-          </a:lnRef>
-          <a:fillRef idx="3">
-            <a:schemeClr val="accent1"/>
-          </a:fillRef>
-          <a:effectRef idx="2">
-            <a:schemeClr val="accent1"/>
-          </a:effectRef>
-          <a:fontRef idx="minor">
-            <a:schemeClr val="lt1"/>
-          </a:fontRef>
-        </p:style>
-        <p:txBody>
-          <a:bodyPr rtlCol="0" anchor="ctr"/>
-          <a:lstStyle/>
-          <a:p>
-            <a:pPr algn="ctr"/>
-          </a:p>
-        </p:txBody>
-      </p:sp>
-      <p:sp>
-        <p:nvSpPr>
-          <p:cNvPr id="16" name="TextBox 15"/>
-          <p:cNvSpPr txBox="1"/>
-          <p:nvPr/>
-        </p:nvSpPr>
-        <p:spPr>
-          <a:xfrm>
-            <a:off x="2697480" y="822960"/>
-            <a:ext cx="4572000" cy="274320"/>
-          </a:xfrm>
-          <a:prstGeom prst="rect">
-            <a:avLst/>
-          </a:prstGeom>
-          <a:noFill/>
-        </p:spPr>
-        <p:txBody>
-          <a:bodyPr wrap="square">
-            <a:spAutoFit/>
-          </a:bodyPr>
-          <a:lstStyle/>
-          <a:p>
-            <a:r>
-              <a:rPr sz="1300" b="1">
-                <a:solidFill>
-                  <a:srgbClr val="1F2A44"/>
-                </a:solidFill>
-                <a:latin typeface="Calibri"/>
-              </a:rPr>
-              <a:t>MTS Backend Environment (CAT 3)</a:t>
-            </a:r>
-          </a:p>
-        </p:txBody>
-      </p:sp>
-      <p:sp>
-        <p:nvSpPr>
-          <p:cNvPr id="17" name="Rounded Rectangle 16"/>
-          <p:cNvSpPr/>
-          <p:nvPr/>
-        </p:nvSpPr>
-        <p:spPr>
-          <a:xfrm>
-            <a:off x="2697480" y="1143000"/>
-            <a:ext cx="4663440" cy="960120"/>
-          </a:xfrm>
-          <a:prstGeom prst="roundRect">
-            <a:avLst>
-              <a:gd name="adj" fmla="val 10000"/>
-            </a:avLst>
-          </a:prstGeom>
-          <a:solidFill>
-            <a:srgbClr val="FBF3E0"/>
-          </a:solidFill>
-          <a:ln w="15875">
-            <a:solidFill>
-              <a:srgbClr val="C9B88E"/>
-            </a:solidFill>
-          </a:ln>
-          <a:effectLst>
-            <a:outerShdw blurRad="50800" dist="38100" dir="2700000" algn="tl" rotWithShape="0">
-              <a:srgbClr val="000000">
-                <a:alpha val="20000"/>
-              </a:srgbClr>
-            </a:outerShdw>
-          </a:effectLst>
-        </p:spPr>
-        <p:style>
-          <a:lnRef idx="1">
-            <a:schemeClr val="accent1"/>
-          </a:lnRef>
-          <a:fillRef idx="3">
-            <a:schemeClr val="accent1"/>
-          </a:fillRef>
-          <a:effectRef idx="2">
-            <a:schemeClr val="accent1"/>
-          </a:effectRef>
-          <a:fontRef idx="minor">
-            <a:schemeClr val="lt1"/>
-          </a:fontRef>
-        </p:style>
-        <p:txBody>
-          <a:bodyPr rtlCol="0" anchor="ctr"/>
-          <a:lstStyle/>
-          <a:p>
-            <a:pPr algn="ctr"/>
-          </a:p>
-        </p:txBody>
-      </p:sp>
-      <p:pic>
-        <p:nvPicPr>
-          <p:cNvPr id="18" name="Picture 17" descr="aks.png"/>
-          <p:cNvPicPr>
-            <a:picLocks noChangeAspect="1"/>
-          </p:cNvPicPr>
-          <p:nvPr/>
-        </p:nvPicPr>
-        <p:blipFill>
-          <a:blip r:embed="rId3"/>
-          <a:stretch>
-            <a:fillRect/>
-          </a:stretch>
-        </p:blipFill>
-        <p:spPr>
-          <a:xfrm>
-            <a:off x="2788920" y="1252728"/>
-            <a:ext cx="347472" cy="347472"/>
-          </a:xfrm>
-          <a:prstGeom prst="rect">
-            <a:avLst/>
-          </a:prstGeom>
-        </p:spPr>
-      </p:pic>
-      <p:sp>
-        <p:nvSpPr>
-          <p:cNvPr id="19" name="TextBox 18"/>
-          <p:cNvSpPr txBox="1"/>
-          <p:nvPr/>
-        </p:nvSpPr>
-        <p:spPr>
-          <a:xfrm>
-            <a:off x="3200400" y="1216152"/>
-            <a:ext cx="4069080" cy="850392"/>
-          </a:xfrm>
-          <a:prstGeom prst="rect">
-            <a:avLst/>
-          </a:prstGeom>
-          <a:noFill/>
-        </p:spPr>
-        <p:txBody>
-          <a:bodyPr wrap="square">
-            <a:spAutoFit/>
-          </a:bodyPr>
-          <a:lstStyle/>
-          <a:p>
-            <a:r>
-              <a:rPr sz="1200" b="1">
-                <a:solidFill>
-                  <a:srgbClr val="222222"/>
-                </a:solidFill>
-                <a:latin typeface="Calibri"/>
-              </a:rPr>
-              <a:t>NS1 · API Gateway Services</a:t>
-            </a:r>
-          </a:p>
-          <a:p>
-            <a:r>
-              <a:rPr sz="900">
-                <a:solidFill>
-                  <a:srgbClr val="222222"/>
-                </a:solidFill>
-                <a:latin typeface="Calibri"/>
-              </a:rPr>
-              <a:t>FastAPI /api/v1 · Upload · Status · Pages · Cancel/Retry · Downloads · JWT</a:t>
-            </a:r>
-          </a:p>
-        </p:txBody>
-      </p:sp>
-      <p:sp>
-        <p:nvSpPr>
-          <p:cNvPr id="20" name="Rounded Rectangle 19"/>
-          <p:cNvSpPr/>
-          <p:nvPr/>
-        </p:nvSpPr>
-        <p:spPr>
-          <a:xfrm>
-            <a:off x="2697480" y="2240280"/>
-            <a:ext cx="4663440" cy="1417320"/>
-          </a:xfrm>
-          <a:prstGeom prst="roundRect">
-            <a:avLst>
-              <a:gd name="adj" fmla="val 10000"/>
-            </a:avLst>
-          </a:prstGeom>
-          <a:solidFill>
-            <a:srgbClr val="FBF3E0"/>
-          </a:solidFill>
-          <a:ln w="15875">
-            <a:solidFill>
-              <a:srgbClr val="C9B88E"/>
-            </a:solidFill>
-          </a:ln>
-          <a:effectLst>
-            <a:outerShdw blurRad="50800" dist="38100" dir="2700000" algn="tl" rotWithShape="0">
-              <a:srgbClr val="000000">
-                <a:alpha val="20000"/>
-              </a:srgbClr>
-            </a:outerShdw>
-          </a:effectLst>
-        </p:spPr>
-        <p:style>
-          <a:lnRef idx="1">
-            <a:schemeClr val="accent1"/>
-          </a:lnRef>
-          <a:fillRef idx="3">
-            <a:schemeClr val="accent1"/>
-          </a:fillRef>
-          <a:effectRef idx="2">
-            <a:schemeClr val="accent1"/>
-          </a:effectRef>
-          <a:fontRef idx="minor">
-            <a:schemeClr val="lt1"/>
-          </a:fontRef>
-        </p:style>
-        <p:txBody>
-          <a:bodyPr rtlCol="0" anchor="ctr"/>
-          <a:lstStyle/>
-          <a:p>
-            <a:pPr algn="ctr"/>
-          </a:p>
-        </p:txBody>
-      </p:sp>
-      <p:pic>
-        <p:nvPicPr>
-          <p:cNvPr id="21" name="Picture 20" descr="aks.png"/>
-          <p:cNvPicPr>
-            <a:picLocks noChangeAspect="1"/>
-          </p:cNvPicPr>
-          <p:nvPr/>
-        </p:nvPicPr>
-        <p:blipFill>
-          <a:blip r:embed="rId3"/>
-          <a:stretch>
-            <a:fillRect/>
-          </a:stretch>
-        </p:blipFill>
-        <p:spPr>
-          <a:xfrm>
-            <a:off x="2788920" y="2350008"/>
-            <a:ext cx="347472" cy="347472"/>
-          </a:xfrm>
-          <a:prstGeom prst="rect">
-            <a:avLst/>
-          </a:prstGeom>
-        </p:spPr>
-      </p:pic>
-      <p:sp>
-        <p:nvSpPr>
-          <p:cNvPr id="22" name="TextBox 21"/>
-          <p:cNvSpPr txBox="1"/>
-          <p:nvPr/>
-        </p:nvSpPr>
-        <p:spPr>
-          <a:xfrm>
-            <a:off x="3200400" y="2313432"/>
-            <a:ext cx="4069080" cy="1307592"/>
-          </a:xfrm>
-          <a:prstGeom prst="rect">
-            <a:avLst/>
-          </a:prstGeom>
-          <a:noFill/>
-        </p:spPr>
-        <p:txBody>
-          <a:bodyPr wrap="square">
-            <a:spAutoFit/>
-          </a:bodyPr>
-          <a:lstStyle/>
-          <a:p>
-            <a:r>
-              <a:rPr sz="1200" b="1">
-                <a:solidFill>
-                  <a:srgbClr val="222222"/>
-                </a:solidFill>
-                <a:latin typeface="Calibri"/>
-              </a:rPr>
-              <a:t>NS2 · Orchestrator &amp; Processing</a:t>
-            </a:r>
-          </a:p>
-          <a:p>
-            <a:r>
-              <a:rPr sz="900">
-                <a:solidFill>
-                  <a:srgbClr val="222222"/>
-                </a:solidFill>
-                <a:latin typeface="Calibri"/>
-              </a:rPr>
-              <a:t>Intake/Extract → Gateway/Profiles → Translate → Export
-Data Security Gateway · Rule/Profile library · JWT between services</a:t>
-            </a:r>
-          </a:p>
-        </p:txBody>
-      </p:sp>
-      <p:sp>
-        <p:nvSpPr>
-          <p:cNvPr id="23" name="Rounded Rectangle 22"/>
-          <p:cNvSpPr/>
-          <p:nvPr/>
-        </p:nvSpPr>
-        <p:spPr>
-          <a:xfrm>
-            <a:off x="2697480" y="3794760"/>
-            <a:ext cx="4663440" cy="1051560"/>
-          </a:xfrm>
-          <a:prstGeom prst="roundRect">
-            <a:avLst>
-              <a:gd name="adj" fmla="val 10000"/>
-            </a:avLst>
-          </a:prstGeom>
-          <a:solidFill>
-            <a:srgbClr val="FBF3E0"/>
-          </a:solidFill>
-          <a:ln w="15875">
-            <a:solidFill>
-              <a:srgbClr val="C9B88E"/>
-            </a:solidFill>
-          </a:ln>
-          <a:effectLst>
-            <a:outerShdw blurRad="50800" dist="38100" dir="2700000" algn="tl" rotWithShape="0">
-              <a:srgbClr val="000000">
-                <a:alpha val="20000"/>
-              </a:srgbClr>
-            </a:outerShdw>
-          </a:effectLst>
-        </p:spPr>
-        <p:style>
-          <a:lnRef idx="1">
-            <a:schemeClr val="accent1"/>
-          </a:lnRef>
-          <a:fillRef idx="3">
-            <a:schemeClr val="accent1"/>
-          </a:fillRef>
-          <a:effectRef idx="2">
-            <a:schemeClr val="accent1"/>
-          </a:effectRef>
-          <a:fontRef idx="minor">
-            <a:schemeClr val="lt1"/>
-          </a:fontRef>
-        </p:style>
-        <p:txBody>
-          <a:bodyPr rtlCol="0" anchor="ctr"/>
-          <a:lstStyle/>
-          <a:p>
-            <a:pPr algn="ctr"/>
-          </a:p>
-        </p:txBody>
-      </p:sp>
-      <p:pic>
-        <p:nvPicPr>
-          <p:cNvPr id="24" name="Picture 23" descr="aks.png"/>
-          <p:cNvPicPr>
-            <a:picLocks noChangeAspect="1"/>
-          </p:cNvPicPr>
-          <p:nvPr/>
-        </p:nvPicPr>
-        <p:blipFill>
-          <a:blip r:embed="rId3"/>
-          <a:stretch>
-            <a:fillRect/>
-          </a:stretch>
-        </p:blipFill>
-        <p:spPr>
-          <a:xfrm>
-            <a:off x="2788920" y="3904488"/>
-            <a:ext cx="347472" cy="347472"/>
-          </a:xfrm>
-          <a:prstGeom prst="rect">
-            <a:avLst/>
-          </a:prstGeom>
-        </p:spPr>
-      </p:pic>
-      <p:sp>
-        <p:nvSpPr>
-          <p:cNvPr id="25" name="TextBox 24"/>
-          <p:cNvSpPr txBox="1"/>
-          <p:nvPr/>
-        </p:nvSpPr>
-        <p:spPr>
-          <a:xfrm>
-            <a:off x="3200400" y="3867912"/>
-            <a:ext cx="4069080" cy="941832"/>
-          </a:xfrm>
-          <a:prstGeom prst="rect">
-            <a:avLst/>
-          </a:prstGeom>
-          <a:noFill/>
-        </p:spPr>
-        <p:txBody>
-          <a:bodyPr wrap="square">
-            <a:spAutoFit/>
-          </a:bodyPr>
-          <a:lstStyle/>
-          <a:p>
-            <a:r>
-              <a:rPr sz="1200" b="1">
-                <a:solidFill>
-                  <a:srgbClr val="222222"/>
-                </a:solidFill>
-                <a:latin typeface="Calibri"/>
-              </a:rPr>
-              <a:t>NS3 · Workers &amp; Agents</a:t>
-            </a:r>
-          </a:p>
-          <a:p>
-            <a:r>
-              <a:rPr sz="900">
-                <a:solidFill>
-                  <a:srgbClr val="222222"/>
-                </a:solidFill>
-                <a:latin typeface="Calibri"/>
-              </a:rPr>
-              <a:t>Page-range DI worker · Translation worker · Retention · Prompt library · Token service</a:t>
-            </a:r>
-          </a:p>
-        </p:txBody>
-      </p:sp>
-      <p:sp>
-        <p:nvSpPr>
-          <p:cNvPr id="26" name="Rounded Rectangle 25"/>
-          <p:cNvSpPr/>
-          <p:nvPr/>
-        </p:nvSpPr>
-        <p:spPr>
-          <a:xfrm>
-            <a:off x="7818120" y="777240"/>
-            <a:ext cx="1371600" cy="640080"/>
+            <a:off x="9372600" y="777240"/>
+            <a:ext cx="1463040" cy="640080"/>
           </a:xfrm>
           <a:prstGeom prst="roundRect">
             <a:avLst>
@@ -4277,40 +4182,16 @@
           </a:p>
         </p:txBody>
       </p:sp>
-      <p:pic>
-        <p:nvPicPr>
-          <p:cNvPr id="27" name="Picture 26" descr="apim.png"/>
-          <p:cNvPicPr>
-            <a:picLocks noChangeAspect="1"/>
-          </p:cNvPicPr>
-          <p:nvPr/>
-        </p:nvPicPr>
-        <p:blipFill>
-          <a:blip r:embed="rId4"/>
-          <a:stretch>
-            <a:fillRect/>
-          </a:stretch>
-        </p:blipFill>
-        <p:spPr>
-          <a:xfrm>
-            <a:off x="7909560" y="886968"/>
-            <a:ext cx="347472" cy="347472"/>
-          </a:xfrm>
-          <a:prstGeom prst="rect">
-            <a:avLst/>
-          </a:prstGeom>
-        </p:spPr>
-      </p:pic>
-      <p:sp>
-        <p:nvSpPr>
-          <p:cNvPr id="28" name="TextBox 27"/>
+      <p:sp>
+        <p:nvSpPr>
+          <p:cNvPr id="23" name="TextBox 22"/>
           <p:cNvSpPr txBox="1"/>
           <p:nvPr/>
         </p:nvSpPr>
         <p:spPr>
           <a:xfrm>
-            <a:off x="8321040" y="850392"/>
-            <a:ext cx="777240" cy="530352"/>
+            <a:off x="9482328" y="850392"/>
+            <a:ext cx="1261872" cy="530352"/>
           </a:xfrm>
           <a:prstGeom prst="rect">
             <a:avLst/>
@@ -4330,7 +4211,7 @@
                 </a:solidFill>
                 <a:latin typeface="Calibri"/>
               </a:rPr>
-              <a:t>APIM</a:t>
+              <a:t>App Gateway</a:t>
             </a:r>
           </a:p>
           <a:p>
@@ -4341,21 +4222,406 @@
                 </a:solidFill>
                 <a:latin typeface="Calibri"/>
               </a:rPr>
-              <a:t>JWT · throttle</a:t>
-            </a:r>
-          </a:p>
-        </p:txBody>
-      </p:sp>
-      <p:sp>
-        <p:nvSpPr>
-          <p:cNvPr id="29" name="Rounded Rectangle 28"/>
+              <a:t>AI path</a:t>
+            </a:r>
+          </a:p>
+        </p:txBody>
+      </p:sp>
+      <p:sp>
+        <p:nvSpPr>
+          <p:cNvPr id="24" name="Rounded Rectangle 23"/>
           <p:cNvSpPr/>
           <p:nvPr/>
         </p:nvSpPr>
         <p:spPr>
           <a:xfrm>
-            <a:off x="9372600" y="777240"/>
-            <a:ext cx="1463040" cy="640080"/>
+            <a:off x="7818120" y="1554480"/>
+            <a:ext cx="4069080" cy="2606040"/>
+          </a:xfrm>
+          <a:prstGeom prst="roundRect">
+            <a:avLst>
+              <a:gd name="adj" fmla="val 5000"/>
+            </a:avLst>
+          </a:prstGeom>
+          <a:solidFill>
+            <a:srgbClr val="FBF3E0"/>
+          </a:solidFill>
+          <a:ln w="22225">
+            <a:solidFill>
+              <a:srgbClr val="C9B88E"/>
+            </a:solidFill>
+          </a:ln>
+          <a:effectLst>
+            <a:outerShdw blurRad="50800" dist="38100" dir="2700000" algn="tl" rotWithShape="0">
+              <a:srgbClr val="000000">
+                <a:alpha val="20000"/>
+              </a:srgbClr>
+            </a:outerShdw>
+          </a:effectLst>
+        </p:spPr>
+        <p:style>
+          <a:lnRef idx="1">
+            <a:schemeClr val="accent1"/>
+          </a:lnRef>
+          <a:fillRef idx="3">
+            <a:schemeClr val="accent1"/>
+          </a:fillRef>
+          <a:effectRef idx="2">
+            <a:schemeClr val="accent1"/>
+          </a:effectRef>
+          <a:fontRef idx="minor">
+            <a:schemeClr val="lt1"/>
+          </a:fontRef>
+        </p:style>
+        <p:txBody>
+          <a:bodyPr rtlCol="0" anchor="ctr"/>
+          <a:lstStyle/>
+          <a:p>
+            <a:pPr algn="ctr"/>
+          </a:p>
+        </p:txBody>
+      </p:sp>
+      <p:sp>
+        <p:nvSpPr>
+          <p:cNvPr id="25" name="TextBox 24"/>
+          <p:cNvSpPr txBox="1"/>
+          <p:nvPr/>
+        </p:nvSpPr>
+        <p:spPr>
+          <a:xfrm>
+            <a:off x="7955279" y="1645920"/>
+            <a:ext cx="3657600" cy="256032"/>
+          </a:xfrm>
+          <a:prstGeom prst="rect">
+            <a:avLst/>
+          </a:prstGeom>
+          <a:noFill/>
+        </p:spPr>
+        <p:txBody>
+          <a:bodyPr wrap="square">
+            <a:spAutoFit/>
+          </a:bodyPr>
+          <a:lstStyle/>
+          <a:p>
+            <a:r>
+              <a:rPr sz="1300" b="1">
+                <a:solidFill>
+                  <a:srgbClr val="1F2A44"/>
+                </a:solidFill>
+                <a:latin typeface="Calibri"/>
+              </a:rPr>
+              <a:t>AI HUB (CAT 1)</a:t>
+            </a:r>
+          </a:p>
+        </p:txBody>
+      </p:sp>
+      <p:sp>
+        <p:nvSpPr>
+          <p:cNvPr id="26" name="Rounded Rectangle 25"/>
+          <p:cNvSpPr/>
+          <p:nvPr/>
+        </p:nvSpPr>
+        <p:spPr>
+          <a:xfrm>
+            <a:off x="8001000" y="1965960"/>
+            <a:ext cx="3703320" cy="594360"/>
+          </a:xfrm>
+          <a:prstGeom prst="roundRect">
+            <a:avLst>
+              <a:gd name="adj" fmla="val 10000"/>
+            </a:avLst>
+          </a:prstGeom>
+          <a:solidFill>
+            <a:srgbClr val="FFFFFF"/>
+          </a:solidFill>
+          <a:ln w="15875">
+            <a:solidFill>
+              <a:srgbClr val="C9B88E"/>
+            </a:solidFill>
+          </a:ln>
+          <a:effectLst>
+            <a:outerShdw blurRad="50800" dist="38100" dir="2700000" algn="tl" rotWithShape="0">
+              <a:srgbClr val="000000">
+                <a:alpha val="20000"/>
+              </a:srgbClr>
+            </a:outerShdw>
+          </a:effectLst>
+        </p:spPr>
+        <p:style>
+          <a:lnRef idx="1">
+            <a:schemeClr val="accent1"/>
+          </a:lnRef>
+          <a:fillRef idx="3">
+            <a:schemeClr val="accent1"/>
+          </a:fillRef>
+          <a:effectRef idx="2">
+            <a:schemeClr val="accent1"/>
+          </a:effectRef>
+          <a:fontRef idx="minor">
+            <a:schemeClr val="lt1"/>
+          </a:fontRef>
+        </p:style>
+        <p:txBody>
+          <a:bodyPr rtlCol="0" anchor="ctr"/>
+          <a:lstStyle/>
+          <a:p>
+            <a:pPr algn="ctr"/>
+          </a:p>
+        </p:txBody>
+      </p:sp>
+      <p:sp>
+        <p:nvSpPr>
+          <p:cNvPr id="27" name="TextBox 26"/>
+          <p:cNvSpPr txBox="1"/>
+          <p:nvPr/>
+        </p:nvSpPr>
+        <p:spPr>
+          <a:xfrm>
+            <a:off x="8110728" y="2039112"/>
+            <a:ext cx="3502152" cy="484632"/>
+          </a:xfrm>
+          <a:prstGeom prst="rect">
+            <a:avLst/>
+          </a:prstGeom>
+          <a:noFill/>
+        </p:spPr>
+        <p:txBody>
+          <a:bodyPr wrap="square">
+            <a:spAutoFit/>
+          </a:bodyPr>
+          <a:lstStyle/>
+          <a:p>
+            <a:r>
+              <a:rPr sz="1100" b="1">
+                <a:solidFill>
+                  <a:srgbClr val="222222"/>
+                </a:solidFill>
+                <a:latin typeface="Calibri"/>
+              </a:rPr>
+              <a:t>Azure OpenAI</a:t>
+            </a:r>
+          </a:p>
+          <a:p>
+            <a:r>
+              <a:rPr sz="800">
+                <a:solidFill>
+                  <a:srgbClr val="222222"/>
+                </a:solidFill>
+                <a:latin typeface="Calibri"/>
+              </a:rPr>
+              <a:t>GPT structured translation</a:t>
+            </a:r>
+          </a:p>
+        </p:txBody>
+      </p:sp>
+      <p:sp>
+        <p:nvSpPr>
+          <p:cNvPr id="28" name="Rounded Rectangle 27"/>
+          <p:cNvSpPr/>
+          <p:nvPr/>
+        </p:nvSpPr>
+        <p:spPr>
+          <a:xfrm>
+            <a:off x="8001000" y="2651760"/>
+            <a:ext cx="3703320" cy="594360"/>
+          </a:xfrm>
+          <a:prstGeom prst="roundRect">
+            <a:avLst>
+              <a:gd name="adj" fmla="val 10000"/>
+            </a:avLst>
+          </a:prstGeom>
+          <a:solidFill>
+            <a:srgbClr val="FFFFFF"/>
+          </a:solidFill>
+          <a:ln w="15875">
+            <a:solidFill>
+              <a:srgbClr val="C9B88E"/>
+            </a:solidFill>
+          </a:ln>
+          <a:effectLst>
+            <a:outerShdw blurRad="50800" dist="38100" dir="2700000" algn="tl" rotWithShape="0">
+              <a:srgbClr val="000000">
+                <a:alpha val="20000"/>
+              </a:srgbClr>
+            </a:outerShdw>
+          </a:effectLst>
+        </p:spPr>
+        <p:style>
+          <a:lnRef idx="1">
+            <a:schemeClr val="accent1"/>
+          </a:lnRef>
+          <a:fillRef idx="3">
+            <a:schemeClr val="accent1"/>
+          </a:fillRef>
+          <a:effectRef idx="2">
+            <a:schemeClr val="accent1"/>
+          </a:effectRef>
+          <a:fontRef idx="minor">
+            <a:schemeClr val="lt1"/>
+          </a:fontRef>
+        </p:style>
+        <p:txBody>
+          <a:bodyPr rtlCol="0" anchor="ctr"/>
+          <a:lstStyle/>
+          <a:p>
+            <a:pPr algn="ctr"/>
+          </a:p>
+        </p:txBody>
+      </p:sp>
+      <p:sp>
+        <p:nvSpPr>
+          <p:cNvPr id="29" name="TextBox 28"/>
+          <p:cNvSpPr txBox="1"/>
+          <p:nvPr/>
+        </p:nvSpPr>
+        <p:spPr>
+          <a:xfrm>
+            <a:off x="8110728" y="2724912"/>
+            <a:ext cx="3502152" cy="484632"/>
+          </a:xfrm>
+          <a:prstGeom prst="rect">
+            <a:avLst/>
+          </a:prstGeom>
+          <a:noFill/>
+        </p:spPr>
+        <p:txBody>
+          <a:bodyPr wrap="square">
+            <a:spAutoFit/>
+          </a:bodyPr>
+          <a:lstStyle/>
+          <a:p>
+            <a:r>
+              <a:rPr sz="1100" b="1">
+                <a:solidFill>
+                  <a:srgbClr val="222222"/>
+                </a:solidFill>
+                <a:latin typeface="Calibri"/>
+              </a:rPr>
+              <a:t>Document Intelligence 4.0</a:t>
+            </a:r>
+          </a:p>
+          <a:p>
+            <a:r>
+              <a:rPr sz="800">
+                <a:solidFill>
+                  <a:srgbClr val="222222"/>
+                </a:solidFill>
+                <a:latin typeface="Calibri"/>
+              </a:rPr>
+              <a:t>prebuilt-layout · OCR · languages</a:t>
+            </a:r>
+          </a:p>
+        </p:txBody>
+      </p:sp>
+      <p:sp>
+        <p:nvSpPr>
+          <p:cNvPr id="30" name="Rounded Rectangle 29"/>
+          <p:cNvSpPr/>
+          <p:nvPr/>
+        </p:nvSpPr>
+        <p:spPr>
+          <a:xfrm>
+            <a:off x="8001000" y="3337560"/>
+            <a:ext cx="3703320" cy="594360"/>
+          </a:xfrm>
+          <a:prstGeom prst="roundRect">
+            <a:avLst>
+              <a:gd name="adj" fmla="val 10000"/>
+            </a:avLst>
+          </a:prstGeom>
+          <a:solidFill>
+            <a:srgbClr val="FFFFFF"/>
+          </a:solidFill>
+          <a:ln w="15875">
+            <a:solidFill>
+              <a:srgbClr val="C9B88E"/>
+            </a:solidFill>
+          </a:ln>
+          <a:effectLst>
+            <a:outerShdw blurRad="50800" dist="38100" dir="2700000" algn="tl" rotWithShape="0">
+              <a:srgbClr val="000000">
+                <a:alpha val="20000"/>
+              </a:srgbClr>
+            </a:outerShdw>
+          </a:effectLst>
+        </p:spPr>
+        <p:style>
+          <a:lnRef idx="1">
+            <a:schemeClr val="accent1"/>
+          </a:lnRef>
+          <a:fillRef idx="3">
+            <a:schemeClr val="accent1"/>
+          </a:fillRef>
+          <a:effectRef idx="2">
+            <a:schemeClr val="accent1"/>
+          </a:effectRef>
+          <a:fontRef idx="minor">
+            <a:schemeClr val="lt1"/>
+          </a:fontRef>
+        </p:style>
+        <p:txBody>
+          <a:bodyPr rtlCol="0" anchor="ctr"/>
+          <a:lstStyle/>
+          <a:p>
+            <a:pPr algn="ctr"/>
+          </a:p>
+        </p:txBody>
+      </p:sp>
+      <p:sp>
+        <p:nvSpPr>
+          <p:cNvPr id="31" name="TextBox 30"/>
+          <p:cNvSpPr txBox="1"/>
+          <p:nvPr/>
+        </p:nvSpPr>
+        <p:spPr>
+          <a:xfrm>
+            <a:off x="8110728" y="3410712"/>
+            <a:ext cx="3502152" cy="484632"/>
+          </a:xfrm>
+          <a:prstGeom prst="rect">
+            <a:avLst/>
+          </a:prstGeom>
+          <a:noFill/>
+        </p:spPr>
+        <p:txBody>
+          <a:bodyPr wrap="square">
+            <a:spAutoFit/>
+          </a:bodyPr>
+          <a:lstStyle/>
+          <a:p>
+            <a:r>
+              <a:rPr sz="1100" b="1">
+                <a:solidFill>
+                  <a:srgbClr val="222222"/>
+                </a:solidFill>
+                <a:latin typeface="Calibri"/>
+              </a:rPr>
+              <a:t>Azure AI Translator (optional)</a:t>
+            </a:r>
+          </a:p>
+          <a:p>
+            <a:r>
+              <a:rPr sz="800">
+                <a:solidFill>
+                  <a:srgbClr val="222222"/>
+                </a:solidFill>
+                <a:latin typeface="Calibri"/>
+              </a:rPr>
+              <a:t>MANAGED_NO_LLM route</a:t>
+            </a:r>
+          </a:p>
+        </p:txBody>
+      </p:sp>
+      <p:sp>
+        <p:nvSpPr>
+          <p:cNvPr id="32" name="Rounded Rectangle 31"/>
+          <p:cNvSpPr/>
+          <p:nvPr/>
+        </p:nvSpPr>
+        <p:spPr>
+          <a:xfrm>
+            <a:off x="7818120" y="4343400"/>
+            <a:ext cx="1920240" cy="640080"/>
           </a:xfrm>
           <a:prstGeom prst="roundRect">
             <a:avLst>
@@ -4400,40 +4666,16 @@
           </a:p>
         </p:txBody>
       </p:sp>
-      <p:pic>
-        <p:nvPicPr>
-          <p:cNvPr id="30" name="Picture 29" descr="app-gateway.png"/>
-          <p:cNvPicPr>
-            <a:picLocks noChangeAspect="1"/>
-          </p:cNvPicPr>
-          <p:nvPr/>
-        </p:nvPicPr>
-        <p:blipFill>
-          <a:blip r:embed="rId2"/>
-          <a:stretch>
-            <a:fillRect/>
-          </a:stretch>
-        </p:blipFill>
-        <p:spPr>
-          <a:xfrm>
-            <a:off x="9464040" y="886968"/>
-            <a:ext cx="347472" cy="347472"/>
-          </a:xfrm>
-          <a:prstGeom prst="rect">
-            <a:avLst/>
-          </a:prstGeom>
-        </p:spPr>
-      </p:pic>
-      <p:sp>
-        <p:nvSpPr>
-          <p:cNvPr id="31" name="TextBox 30"/>
+      <p:sp>
+        <p:nvSpPr>
+          <p:cNvPr id="33" name="TextBox 32"/>
           <p:cNvSpPr txBox="1"/>
           <p:nvPr/>
         </p:nvSpPr>
         <p:spPr>
           <a:xfrm>
-            <a:off x="9875520" y="850392"/>
-            <a:ext cx="868680" cy="530352"/>
+            <a:off x="7927848" y="4416552"/>
+            <a:ext cx="1719072" cy="530352"/>
           </a:xfrm>
           <a:prstGeom prst="rect">
             <a:avLst/>
@@ -4453,7 +4695,7 @@
                 </a:solidFill>
                 <a:latin typeface="Calibri"/>
               </a:rPr>
-              <a:t>App Gateway</a:t>
+              <a:t>AZ Entra ID</a:t>
             </a:r>
           </a:p>
           <a:p>
@@ -4464,31 +4706,128 @@
                 </a:solidFill>
                 <a:latin typeface="Calibri"/>
               </a:rPr>
-              <a:t>AI path</a:t>
-            </a:r>
-          </a:p>
-        </p:txBody>
-      </p:sp>
-      <p:sp>
-        <p:nvSpPr>
-          <p:cNvPr id="32" name="Rounded Rectangle 31"/>
+              <a:t>App roles · SPN</a:t>
+            </a:r>
+          </a:p>
+        </p:txBody>
+      </p:sp>
+      <p:sp>
+        <p:nvSpPr>
+          <p:cNvPr id="34" name="Rounded Rectangle 33"/>
           <p:cNvSpPr/>
           <p:nvPr/>
         </p:nvSpPr>
         <p:spPr>
           <a:xfrm>
-            <a:off x="7818120" y="1554480"/>
-            <a:ext cx="4069080" cy="2606040"/>
+            <a:off x="9921240" y="4343400"/>
+            <a:ext cx="1965960" cy="640080"/>
           </a:xfrm>
           <a:prstGeom prst="roundRect">
             <a:avLst>
-              <a:gd name="adj" fmla="val 5000"/>
+              <a:gd name="adj" fmla="val 10000"/>
             </a:avLst>
+          </a:prstGeom>
+          <a:solidFill>
+            <a:srgbClr val="EEEEEE"/>
+          </a:solidFill>
+          <a:ln w="15875">
+            <a:solidFill>
+              <a:srgbClr val="999999"/>
+            </a:solidFill>
+          </a:ln>
+          <a:effectLst>
+            <a:outerShdw blurRad="50800" dist="38100" dir="2700000" algn="tl" rotWithShape="0">
+              <a:srgbClr val="000000">
+                <a:alpha val="20000"/>
+              </a:srgbClr>
+            </a:outerShdw>
+          </a:effectLst>
+        </p:spPr>
+        <p:style>
+          <a:lnRef idx="1">
+            <a:schemeClr val="accent1"/>
+          </a:lnRef>
+          <a:fillRef idx="3">
+            <a:schemeClr val="accent1"/>
+          </a:fillRef>
+          <a:effectRef idx="2">
+            <a:schemeClr val="accent1"/>
+          </a:effectRef>
+          <a:fontRef idx="minor">
+            <a:schemeClr val="lt1"/>
+          </a:fontRef>
+        </p:style>
+        <p:txBody>
+          <a:bodyPr rtlCol="0" anchor="ctr"/>
+          <a:lstStyle/>
+          <a:p>
+            <a:pPr algn="ctr"/>
+          </a:p>
+        </p:txBody>
+      </p:sp>
+      <p:sp>
+        <p:nvSpPr>
+          <p:cNvPr id="35" name="TextBox 34"/>
+          <p:cNvSpPr txBox="1"/>
+          <p:nvPr/>
+        </p:nvSpPr>
+        <p:spPr>
+          <a:xfrm>
+            <a:off x="10030968" y="4416552"/>
+            <a:ext cx="1764792" cy="530352"/>
+          </a:xfrm>
+          <a:prstGeom prst="rect">
+            <a:avLst/>
+          </a:prstGeom>
+          <a:noFill/>
+        </p:spPr>
+        <p:txBody>
+          <a:bodyPr wrap="square">
+            <a:spAutoFit/>
+          </a:bodyPr>
+          <a:lstStyle/>
+          <a:p>
+            <a:r>
+              <a:rPr sz="1100" b="1">
+                <a:solidFill>
+                  <a:srgbClr val="222222"/>
+                </a:solidFill>
+                <a:latin typeface="Calibri"/>
+              </a:rPr>
+              <a:t>Identity Governance</a:t>
+            </a:r>
+          </a:p>
+          <a:p>
+            <a:r>
+              <a:rPr sz="800">
+                <a:solidFill>
+                  <a:srgbClr val="222222"/>
+                </a:solidFill>
+                <a:latin typeface="Calibri"/>
+              </a:rPr>
+              <a:t>Enterprise IDP</a:t>
+            </a:r>
+          </a:p>
+        </p:txBody>
+      </p:sp>
+      <p:sp>
+        <p:nvSpPr>
+          <p:cNvPr id="36" name="Rounded Rectangle 35"/>
+          <p:cNvSpPr/>
+          <p:nvPr/>
+        </p:nvSpPr>
+        <p:spPr>
+          <a:xfrm>
+            <a:off x="2514600" y="5212080"/>
+            <a:ext cx="9372600" cy="1051560"/>
+          </a:xfrm>
+          <a:prstGeom prst="roundRect">
+            <a:avLst/>
           </a:prstGeom>
           <a:solidFill>
             <a:srgbClr val="FBF3E0"/>
           </a:solidFill>
-          <a:ln w="22225">
+          <a:ln w="19050">
             <a:solidFill>
               <a:srgbClr val="C9B88E"/>
             </a:solidFill>
@@ -4525,14 +4864,14 @@
       </p:sp>
       <p:sp>
         <p:nvSpPr>
-          <p:cNvPr id="33" name="TextBox 32"/>
+          <p:cNvPr id="37" name="TextBox 36"/>
           <p:cNvSpPr txBox="1"/>
           <p:nvPr/>
         </p:nvSpPr>
         <p:spPr>
           <a:xfrm>
-            <a:off x="7955279" y="1645920"/>
-            <a:ext cx="3657600" cy="256032"/>
+            <a:off x="2651760" y="5257800"/>
+            <a:ext cx="8961120" cy="228600"/>
           </a:xfrm>
           <a:prstGeom prst="rect">
             <a:avLst/>
@@ -4546,27 +4885,27 @@
           <a:lstStyle/>
           <a:p>
             <a:r>
-              <a:rPr sz="1300" b="1">
+              <a:rPr sz="1100" b="1">
                 <a:solidFill>
                   <a:srgbClr val="1F2A44"/>
                 </a:solidFill>
                 <a:latin typeface="Calibri"/>
               </a:rPr>
-              <a:t>AI HUB (CAT 1)</a:t>
-            </a:r>
-          </a:p>
-        </p:txBody>
-      </p:sp>
-      <p:sp>
-        <p:nvSpPr>
-          <p:cNvPr id="34" name="Rounded Rectangle 33"/>
+              <a:t>Data Storage Layer · CMK encryption</a:t>
+            </a:r>
+          </a:p>
+        </p:txBody>
+      </p:sp>
+      <p:sp>
+        <p:nvSpPr>
+          <p:cNvPr id="38" name="Rounded Rectangle 37"/>
           <p:cNvSpPr/>
           <p:nvPr/>
         </p:nvSpPr>
         <p:spPr>
           <a:xfrm>
-            <a:off x="8001000" y="1965960"/>
-            <a:ext cx="3703320" cy="594360"/>
+            <a:off x="2651760" y="5532120"/>
+            <a:ext cx="1920240" cy="640080"/>
           </a:xfrm>
           <a:prstGeom prst="roundRect">
             <a:avLst>
@@ -4611,40 +4950,16 @@
           </a:p>
         </p:txBody>
       </p:sp>
-      <p:pic>
-        <p:nvPicPr>
-          <p:cNvPr id="35" name="Picture 34" descr="openai.png"/>
-          <p:cNvPicPr>
-            <a:picLocks noChangeAspect="1"/>
-          </p:cNvPicPr>
-          <p:nvPr/>
-        </p:nvPicPr>
-        <p:blipFill>
-          <a:blip r:embed="rId5"/>
-          <a:stretch>
-            <a:fillRect/>
-          </a:stretch>
-        </p:blipFill>
-        <p:spPr>
-          <a:xfrm>
-            <a:off x="8092440" y="2075688"/>
-            <a:ext cx="347472" cy="347472"/>
-          </a:xfrm>
-          <a:prstGeom prst="rect">
-            <a:avLst/>
-          </a:prstGeom>
-        </p:spPr>
-      </p:pic>
-      <p:sp>
-        <p:nvSpPr>
-          <p:cNvPr id="36" name="TextBox 35"/>
+      <p:sp>
+        <p:nvSpPr>
+          <p:cNvPr id="39" name="TextBox 38"/>
           <p:cNvSpPr txBox="1"/>
           <p:nvPr/>
         </p:nvSpPr>
         <p:spPr>
           <a:xfrm>
-            <a:off x="8503920" y="2039112"/>
-            <a:ext cx="3108960" cy="484632"/>
+            <a:off x="2761488" y="5605272"/>
+            <a:ext cx="1719072" cy="530352"/>
           </a:xfrm>
           <a:prstGeom prst="rect">
             <a:avLst/>
@@ -4658,38 +4973,27 @@
           <a:lstStyle/>
           <a:p>
             <a:r>
-              <a:rPr sz="1100" b="1">
+              <a:rPr sz="1000" b="1">
                 <a:solidFill>
                   <a:srgbClr val="222222"/>
                 </a:solidFill>
                 <a:latin typeface="Calibri"/>
               </a:rPr>
-              <a:t>Azure OpenAI</a:t>
-            </a:r>
-          </a:p>
-          <a:p>
-            <a:r>
-              <a:rPr sz="800">
-                <a:solidFill>
-                  <a:srgbClr val="222222"/>
-                </a:solidFill>
-                <a:latin typeface="Calibri"/>
-              </a:rPr>
-              <a:t>GPT structured translation</a:t>
-            </a:r>
-          </a:p>
-        </p:txBody>
-      </p:sp>
-      <p:sp>
-        <p:nvSpPr>
-          <p:cNvPr id="37" name="Rounded Rectangle 36"/>
+              <a:t>Service Bus</a:t>
+            </a:r>
+          </a:p>
+        </p:txBody>
+      </p:sp>
+      <p:sp>
+        <p:nvSpPr>
+          <p:cNvPr id="40" name="Rounded Rectangle 39"/>
           <p:cNvSpPr/>
           <p:nvPr/>
         </p:nvSpPr>
         <p:spPr>
           <a:xfrm>
-            <a:off x="8001000" y="2651760"/>
-            <a:ext cx="3703320" cy="594360"/>
+            <a:off x="4709160" y="5532120"/>
+            <a:ext cx="1920240" cy="640080"/>
           </a:xfrm>
           <a:prstGeom prst="roundRect">
             <a:avLst>
@@ -4734,40 +5038,16 @@
           </a:p>
         </p:txBody>
       </p:sp>
-      <p:pic>
-        <p:nvPicPr>
-          <p:cNvPr id="38" name="Picture 37" descr="doc-intel.png"/>
-          <p:cNvPicPr>
-            <a:picLocks noChangeAspect="1"/>
-          </p:cNvPicPr>
-          <p:nvPr/>
-        </p:nvPicPr>
-        <p:blipFill>
-          <a:blip r:embed="rId6"/>
-          <a:stretch>
-            <a:fillRect/>
-          </a:stretch>
-        </p:blipFill>
-        <p:spPr>
-          <a:xfrm>
-            <a:off x="8092440" y="2761488"/>
-            <a:ext cx="347472" cy="347472"/>
-          </a:xfrm>
-          <a:prstGeom prst="rect">
-            <a:avLst/>
-          </a:prstGeom>
-        </p:spPr>
-      </p:pic>
-      <p:sp>
-        <p:nvSpPr>
-          <p:cNvPr id="39" name="TextBox 38"/>
+      <p:sp>
+        <p:nvSpPr>
+          <p:cNvPr id="41" name="TextBox 40"/>
           <p:cNvSpPr txBox="1"/>
           <p:nvPr/>
         </p:nvSpPr>
         <p:spPr>
           <a:xfrm>
-            <a:off x="8503920" y="2724912"/>
-            <a:ext cx="3108960" cy="484632"/>
+            <a:off x="4818888" y="5605272"/>
+            <a:ext cx="1719072" cy="530352"/>
           </a:xfrm>
           <a:prstGeom prst="rect">
             <a:avLst/>
@@ -4781,38 +5061,27 @@
           <a:lstStyle/>
           <a:p>
             <a:r>
-              <a:rPr sz="1100" b="1">
+              <a:rPr sz="1000" b="1">
                 <a:solidFill>
                   <a:srgbClr val="222222"/>
                 </a:solidFill>
                 <a:latin typeface="Calibri"/>
               </a:rPr>
-              <a:t>Document Intelligence 4.0</a:t>
-            </a:r>
-          </a:p>
-          <a:p>
-            <a:r>
-              <a:rPr sz="800">
-                <a:solidFill>
-                  <a:srgbClr val="222222"/>
-                </a:solidFill>
-                <a:latin typeface="Calibri"/>
-              </a:rPr>
-              <a:t>prebuilt-layout · OCR · languages</a:t>
-            </a:r>
-          </a:p>
-        </p:txBody>
-      </p:sp>
-      <p:sp>
-        <p:nvSpPr>
-          <p:cNvPr id="40" name="Rounded Rectangle 39"/>
+              <a:t>Blob Storage</a:t>
+            </a:r>
+          </a:p>
+        </p:txBody>
+      </p:sp>
+      <p:sp>
+        <p:nvSpPr>
+          <p:cNvPr id="42" name="Rounded Rectangle 41"/>
           <p:cNvSpPr/>
           <p:nvPr/>
         </p:nvSpPr>
         <p:spPr>
           <a:xfrm>
-            <a:off x="8001000" y="3337560"/>
-            <a:ext cx="3703320" cy="594360"/>
+            <a:off x="6766560" y="5532120"/>
+            <a:ext cx="1920240" cy="640080"/>
           </a:xfrm>
           <a:prstGeom prst="roundRect">
             <a:avLst>
@@ -4857,40 +5126,16 @@
           </a:p>
         </p:txBody>
       </p:sp>
-      <p:pic>
-        <p:nvPicPr>
-          <p:cNvPr id="41" name="Picture 40" descr="translator.png"/>
-          <p:cNvPicPr>
-            <a:picLocks noChangeAspect="1"/>
-          </p:cNvPicPr>
-          <p:nvPr/>
-        </p:nvPicPr>
-        <p:blipFill>
-          <a:blip r:embed="rId7"/>
-          <a:stretch>
-            <a:fillRect/>
-          </a:stretch>
-        </p:blipFill>
-        <p:spPr>
-          <a:xfrm>
-            <a:off x="8092440" y="3447288"/>
-            <a:ext cx="347472" cy="347472"/>
-          </a:xfrm>
-          <a:prstGeom prst="rect">
-            <a:avLst/>
-          </a:prstGeom>
-        </p:spPr>
-      </p:pic>
-      <p:sp>
-        <p:nvSpPr>
-          <p:cNvPr id="42" name="TextBox 41"/>
+      <p:sp>
+        <p:nvSpPr>
+          <p:cNvPr id="43" name="TextBox 42"/>
           <p:cNvSpPr txBox="1"/>
           <p:nvPr/>
         </p:nvSpPr>
         <p:spPr>
           <a:xfrm>
-            <a:off x="8503920" y="3410712"/>
-            <a:ext cx="3108960" cy="484632"/>
+            <a:off x="6876288" y="5605272"/>
+            <a:ext cx="1719072" cy="530352"/>
           </a:xfrm>
           <a:prstGeom prst="rect">
             <a:avLst/>
@@ -4904,38 +5149,189 @@
           <a:lstStyle/>
           <a:p>
             <a:r>
-              <a:rPr sz="1100" b="1">
+              <a:rPr sz="1000" b="1">
                 <a:solidFill>
                   <a:srgbClr val="222222"/>
                 </a:solidFill>
                 <a:latin typeface="Calibri"/>
               </a:rPr>
-              <a:t>Azure AI Translator</a:t>
-            </a:r>
-          </a:p>
-          <a:p>
-            <a:r>
-              <a:rPr sz="800">
+              <a:t>Azure Database
+for PostgreSQL</a:t>
+            </a:r>
+          </a:p>
+        </p:txBody>
+      </p:sp>
+      <p:sp>
+        <p:nvSpPr>
+          <p:cNvPr id="44" name="Rounded Rectangle 43"/>
+          <p:cNvSpPr/>
+          <p:nvPr/>
+        </p:nvSpPr>
+        <p:spPr>
+          <a:xfrm>
+            <a:off x="9052560" y="5532120"/>
+            <a:ext cx="1920240" cy="640080"/>
+          </a:xfrm>
+          <a:prstGeom prst="roundRect">
+            <a:avLst>
+              <a:gd name="adj" fmla="val 10000"/>
+            </a:avLst>
+          </a:prstGeom>
+          <a:solidFill>
+            <a:srgbClr val="FFFFFF"/>
+          </a:solidFill>
+          <a:ln w="15875">
+            <a:solidFill>
+              <a:srgbClr val="C9B88E"/>
+            </a:solidFill>
+          </a:ln>
+          <a:effectLst>
+            <a:outerShdw blurRad="50800" dist="38100" dir="2700000" algn="tl" rotWithShape="0">
+              <a:srgbClr val="000000">
+                <a:alpha val="20000"/>
+              </a:srgbClr>
+            </a:outerShdw>
+          </a:effectLst>
+        </p:spPr>
+        <p:style>
+          <a:lnRef idx="1">
+            <a:schemeClr val="accent1"/>
+          </a:lnRef>
+          <a:fillRef idx="3">
+            <a:schemeClr val="accent1"/>
+          </a:fillRef>
+          <a:effectRef idx="2">
+            <a:schemeClr val="accent1"/>
+          </a:effectRef>
+          <a:fontRef idx="minor">
+            <a:schemeClr val="lt1"/>
+          </a:fontRef>
+        </p:style>
+        <p:txBody>
+          <a:bodyPr rtlCol="0" anchor="ctr"/>
+          <a:lstStyle/>
+          <a:p>
+            <a:pPr algn="ctr"/>
+          </a:p>
+        </p:txBody>
+      </p:sp>
+      <p:sp>
+        <p:nvSpPr>
+          <p:cNvPr id="45" name="TextBox 44"/>
+          <p:cNvSpPr txBox="1"/>
+          <p:nvPr/>
+        </p:nvSpPr>
+        <p:spPr>
+          <a:xfrm>
+            <a:off x="9162288" y="5605272"/>
+            <a:ext cx="1719072" cy="530352"/>
+          </a:xfrm>
+          <a:prstGeom prst="rect">
+            <a:avLst/>
+          </a:prstGeom>
+          <a:noFill/>
+        </p:spPr>
+        <p:txBody>
+          <a:bodyPr wrap="square">
+            <a:spAutoFit/>
+          </a:bodyPr>
+          <a:lstStyle/>
+          <a:p>
+            <a:r>
+              <a:rPr sz="1000" b="1">
                 <a:solidFill>
                   <a:srgbClr val="222222"/>
                 </a:solidFill>
                 <a:latin typeface="Calibri"/>
               </a:rPr>
-              <a:t>Non-LLM route</a:t>
-            </a:r>
-          </a:p>
-        </p:txBody>
-      </p:sp>
-      <p:sp>
-        <p:nvSpPr>
-          <p:cNvPr id="43" name="Rounded Rectangle 42"/>
+              <a:t>Cache for Redis
+(optional)</a:t>
+            </a:r>
+          </a:p>
+        </p:txBody>
+      </p:sp>
+      <p:cxnSp>
+        <p:nvCxnSpPr>
+          <p:cNvPr id="46" name="Connector 45"/>
+          <p:cNvCxnSpPr/>
+          <p:nvPr/>
+        </p:nvCxnSpPr>
+        <p:spPr>
+          <a:xfrm>
+            <a:off x="2286000" y="2743200"/>
+            <a:ext cx="228600" cy="0"/>
+          </a:xfrm>
+          <a:prstGeom prst="line">
+            <a:avLst/>
+          </a:prstGeom>
+          <a:ln w="22225">
+            <a:solidFill>
+              <a:srgbClr val="444444"/>
+            </a:solidFill>
+            <a:tailEnd type="triangle" w="med" len="med"/>
+          </a:ln>
+        </p:spPr>
+        <p:style>
+          <a:lnRef idx="2">
+            <a:schemeClr val="accent1"/>
+          </a:lnRef>
+          <a:fillRef idx="0">
+            <a:schemeClr val="accent1"/>
+          </a:fillRef>
+          <a:effectRef idx="1">
+            <a:schemeClr val="accent1"/>
+          </a:effectRef>
+          <a:fontRef idx="minor">
+            <a:schemeClr val="tx1"/>
+          </a:fontRef>
+        </p:style>
+      </p:cxnSp>
+      <p:cxnSp>
+        <p:nvCxnSpPr>
+          <p:cNvPr id="47" name="Connector 46"/>
+          <p:cNvCxnSpPr/>
+          <p:nvPr/>
+        </p:nvCxnSpPr>
+        <p:spPr>
+          <a:xfrm flipV="1">
+            <a:off x="7543800" y="1097280"/>
+            <a:ext cx="274320" cy="1645920"/>
+          </a:xfrm>
+          <a:prstGeom prst="line">
+            <a:avLst/>
+          </a:prstGeom>
+          <a:ln w="22225">
+            <a:solidFill>
+              <a:srgbClr val="444444"/>
+            </a:solidFill>
+            <a:tailEnd type="triangle" w="med" len="med"/>
+          </a:ln>
+        </p:spPr>
+        <p:style>
+          <a:lnRef idx="2">
+            <a:schemeClr val="accent1"/>
+          </a:lnRef>
+          <a:fillRef idx="0">
+            <a:schemeClr val="accent1"/>
+          </a:fillRef>
+          <a:effectRef idx="1">
+            <a:schemeClr val="accent1"/>
+          </a:effectRef>
+          <a:fontRef idx="minor">
+            <a:schemeClr val="tx1"/>
+          </a:fontRef>
+        </p:style>
+      </p:cxnSp>
+      <p:sp>
+        <p:nvSpPr>
+          <p:cNvPr id="48" name="Rounded Rectangle 47"/>
           <p:cNvSpPr/>
           <p:nvPr/>
         </p:nvSpPr>
         <p:spPr>
           <a:xfrm>
-            <a:off x="7818120" y="4343400"/>
-            <a:ext cx="1920240" cy="640080"/>
+            <a:off x="274320" y="6446520"/>
+            <a:ext cx="1417320" cy="320040"/>
           </a:xfrm>
           <a:prstGeom prst="roundRect">
             <a:avLst>
@@ -4980,40 +5376,16 @@
           </a:p>
         </p:txBody>
       </p:sp>
-      <p:pic>
-        <p:nvPicPr>
-          <p:cNvPr id="44" name="Picture 43" descr="entra.png"/>
-          <p:cNvPicPr>
-            <a:picLocks noChangeAspect="1"/>
-          </p:cNvPicPr>
-          <p:nvPr/>
-        </p:nvPicPr>
-        <p:blipFill>
-          <a:blip r:embed="rId8"/>
-          <a:stretch>
-            <a:fillRect/>
-          </a:stretch>
-        </p:blipFill>
-        <p:spPr>
-          <a:xfrm>
-            <a:off x="7909560" y="4453128"/>
-            <a:ext cx="347472" cy="347472"/>
-          </a:xfrm>
-          <a:prstGeom prst="rect">
-            <a:avLst/>
-          </a:prstGeom>
-        </p:spPr>
-      </p:pic>
-      <p:sp>
-        <p:nvSpPr>
-          <p:cNvPr id="45" name="TextBox 44"/>
+      <p:sp>
+        <p:nvSpPr>
+          <p:cNvPr id="49" name="TextBox 48"/>
           <p:cNvSpPr txBox="1"/>
           <p:nvPr/>
         </p:nvSpPr>
         <p:spPr>
           <a:xfrm>
-            <a:off x="8321040" y="4416552"/>
-            <a:ext cx="1325880" cy="530352"/>
+            <a:off x="384048" y="6519672"/>
+            <a:ext cx="1216152" cy="210312"/>
           </a:xfrm>
           <a:prstGeom prst="rect">
             <a:avLst/>
@@ -5027,38 +5399,27 @@
           <a:lstStyle/>
           <a:p>
             <a:r>
-              <a:rPr sz="1100" b="1">
+              <a:rPr sz="900" b="1">
                 <a:solidFill>
                   <a:srgbClr val="222222"/>
                 </a:solidFill>
                 <a:latin typeface="Calibri"/>
               </a:rPr>
-              <a:t>AZ Entra ID</a:t>
-            </a:r>
-          </a:p>
-          <a:p>
-            <a:r>
-              <a:rPr sz="800">
-                <a:solidFill>
-                  <a:srgbClr val="222222"/>
-                </a:solidFill>
-                <a:latin typeface="Calibri"/>
-              </a:rPr>
-              <a:t>App roles · SPN</a:t>
-            </a:r>
-          </a:p>
-        </p:txBody>
-      </p:sp>
-      <p:sp>
-        <p:nvSpPr>
-          <p:cNvPr id="46" name="Rounded Rectangle 45"/>
+              <a:t>Key Vault</a:t>
+            </a:r>
+          </a:p>
+        </p:txBody>
+      </p:sp>
+      <p:sp>
+        <p:nvSpPr>
+          <p:cNvPr id="50" name="Rounded Rectangle 49"/>
           <p:cNvSpPr/>
           <p:nvPr/>
         </p:nvSpPr>
         <p:spPr>
           <a:xfrm>
-            <a:off x="9921240" y="4343400"/>
-            <a:ext cx="1965960" cy="640080"/>
+            <a:off x="2011680" y="6446520"/>
+            <a:ext cx="1417320" cy="320040"/>
           </a:xfrm>
           <a:prstGeom prst="roundRect">
             <a:avLst>
@@ -5105,14 +5466,14 @@
       </p:sp>
       <p:sp>
         <p:nvSpPr>
-          <p:cNvPr id="47" name="TextBox 46"/>
+          <p:cNvPr id="51" name="TextBox 50"/>
           <p:cNvSpPr txBox="1"/>
           <p:nvPr/>
         </p:nvSpPr>
         <p:spPr>
           <a:xfrm>
-            <a:off x="10030968" y="4416552"/>
-            <a:ext cx="1764792" cy="530352"/>
+            <a:off x="2121408" y="6519672"/>
+            <a:ext cx="1216152" cy="210312"/>
           </a:xfrm>
           <a:prstGeom prst="rect">
             <a:avLst/>
@@ -5126,755 +5487,26 @@
           <a:lstStyle/>
           <a:p>
             <a:r>
-              <a:rPr sz="1100" b="1">
+              <a:rPr sz="900" b="1">
                 <a:solidFill>
                   <a:srgbClr val="222222"/>
                 </a:solidFill>
                 <a:latin typeface="Calibri"/>
               </a:rPr>
-              <a:t>Identity Governance</a:t>
-            </a:r>
-          </a:p>
-          <a:p>
-            <a:r>
-              <a:rPr sz="800">
-                <a:solidFill>
-                  <a:srgbClr val="222222"/>
-                </a:solidFill>
-                <a:latin typeface="Calibri"/>
-              </a:rPr>
-              <a:t>Enterprise IDP</a:t>
-            </a:r>
-          </a:p>
-        </p:txBody>
-      </p:sp>
-      <p:sp>
-        <p:nvSpPr>
-          <p:cNvPr id="48" name="Rounded Rectangle 47"/>
+              <a:t>Entra Identity</a:t>
+            </a:r>
+          </a:p>
+        </p:txBody>
+      </p:sp>
+      <p:sp>
+        <p:nvSpPr>
+          <p:cNvPr id="52" name="Rounded Rectangle 51"/>
           <p:cNvSpPr/>
           <p:nvPr/>
         </p:nvSpPr>
         <p:spPr>
           <a:xfrm>
-            <a:off x="2514600" y="5212080"/>
-            <a:ext cx="9372600" cy="1051560"/>
-          </a:xfrm>
-          <a:prstGeom prst="roundRect">
-            <a:avLst/>
-          </a:prstGeom>
-          <a:solidFill>
-            <a:srgbClr val="FBF3E0"/>
-          </a:solidFill>
-          <a:ln w="19050">
-            <a:solidFill>
-              <a:srgbClr val="C9B88E"/>
-            </a:solidFill>
-          </a:ln>
-          <a:effectLst>
-            <a:outerShdw blurRad="50800" dist="38100" dir="2700000" algn="tl" rotWithShape="0">
-              <a:srgbClr val="000000">
-                <a:alpha val="20000"/>
-              </a:srgbClr>
-            </a:outerShdw>
-          </a:effectLst>
-        </p:spPr>
-        <p:style>
-          <a:lnRef idx="1">
-            <a:schemeClr val="accent1"/>
-          </a:lnRef>
-          <a:fillRef idx="3">
-            <a:schemeClr val="accent1"/>
-          </a:fillRef>
-          <a:effectRef idx="2">
-            <a:schemeClr val="accent1"/>
-          </a:effectRef>
-          <a:fontRef idx="minor">
-            <a:schemeClr val="lt1"/>
-          </a:fontRef>
-        </p:style>
-        <p:txBody>
-          <a:bodyPr rtlCol="0" anchor="ctr"/>
-          <a:lstStyle/>
-          <a:p>
-            <a:pPr algn="ctr"/>
-          </a:p>
-        </p:txBody>
-      </p:sp>
-      <p:sp>
-        <p:nvSpPr>
-          <p:cNvPr id="49" name="TextBox 48"/>
-          <p:cNvSpPr txBox="1"/>
-          <p:nvPr/>
-        </p:nvSpPr>
-        <p:spPr>
-          <a:xfrm>
-            <a:off x="2651760" y="5257800"/>
-            <a:ext cx="8961120" cy="228600"/>
-          </a:xfrm>
-          <a:prstGeom prst="rect">
-            <a:avLst/>
-          </a:prstGeom>
-          <a:noFill/>
-        </p:spPr>
-        <p:txBody>
-          <a:bodyPr wrap="square">
-            <a:spAutoFit/>
-          </a:bodyPr>
-          <a:lstStyle/>
-          <a:p>
-            <a:r>
-              <a:rPr sz="1100" b="1">
-                <a:solidFill>
-                  <a:srgbClr val="1F2A44"/>
-                </a:solidFill>
-                <a:latin typeface="Calibri"/>
-              </a:rPr>
-              <a:t>Data Storage Layer · CMK encryption</a:t>
-            </a:r>
-          </a:p>
-        </p:txBody>
-      </p:sp>
-      <p:sp>
-        <p:nvSpPr>
-          <p:cNvPr id="50" name="Rounded Rectangle 49"/>
-          <p:cNvSpPr/>
-          <p:nvPr/>
-        </p:nvSpPr>
-        <p:spPr>
-          <a:xfrm>
-            <a:off x="2651760" y="5532120"/>
-            <a:ext cx="1645920" cy="640080"/>
-          </a:xfrm>
-          <a:prstGeom prst="roundRect">
-            <a:avLst>
-              <a:gd name="adj" fmla="val 10000"/>
-            </a:avLst>
-          </a:prstGeom>
-          <a:solidFill>
-            <a:srgbClr val="FFFFFF"/>
-          </a:solidFill>
-          <a:ln w="15875">
-            <a:solidFill>
-              <a:srgbClr val="C9B88E"/>
-            </a:solidFill>
-          </a:ln>
-          <a:effectLst>
-            <a:outerShdw blurRad="50800" dist="38100" dir="2700000" algn="tl" rotWithShape="0">
-              <a:srgbClr val="000000">
-                <a:alpha val="20000"/>
-              </a:srgbClr>
-            </a:outerShdw>
-          </a:effectLst>
-        </p:spPr>
-        <p:style>
-          <a:lnRef idx="1">
-            <a:schemeClr val="accent1"/>
-          </a:lnRef>
-          <a:fillRef idx="3">
-            <a:schemeClr val="accent1"/>
-          </a:fillRef>
-          <a:effectRef idx="2">
-            <a:schemeClr val="accent1"/>
-          </a:effectRef>
-          <a:fontRef idx="minor">
-            <a:schemeClr val="lt1"/>
-          </a:fontRef>
-        </p:style>
-        <p:txBody>
-          <a:bodyPr rtlCol="0" anchor="ctr"/>
-          <a:lstStyle/>
-          <a:p>
-            <a:pPr algn="ctr"/>
-          </a:p>
-        </p:txBody>
-      </p:sp>
-      <p:pic>
-        <p:nvPicPr>
-          <p:cNvPr id="51" name="Picture 50" descr="service-bus.png"/>
-          <p:cNvPicPr>
-            <a:picLocks noChangeAspect="1"/>
-          </p:cNvPicPr>
-          <p:nvPr/>
-        </p:nvPicPr>
-        <p:blipFill>
-          <a:blip r:embed="rId9"/>
-          <a:stretch>
-            <a:fillRect/>
-          </a:stretch>
-        </p:blipFill>
-        <p:spPr>
-          <a:xfrm>
-            <a:off x="2743200" y="5641848"/>
-            <a:ext cx="347472" cy="347472"/>
-          </a:xfrm>
-          <a:prstGeom prst="rect">
-            <a:avLst/>
-          </a:prstGeom>
-        </p:spPr>
-      </p:pic>
-      <p:sp>
-        <p:nvSpPr>
-          <p:cNvPr id="52" name="TextBox 51"/>
-          <p:cNvSpPr txBox="1"/>
-          <p:nvPr/>
-        </p:nvSpPr>
-        <p:spPr>
-          <a:xfrm>
-            <a:off x="3154680" y="5605272"/>
-            <a:ext cx="1051560" cy="530352"/>
-          </a:xfrm>
-          <a:prstGeom prst="rect">
-            <a:avLst/>
-          </a:prstGeom>
-          <a:noFill/>
-        </p:spPr>
-        <p:txBody>
-          <a:bodyPr wrap="square">
-            <a:spAutoFit/>
-          </a:bodyPr>
-          <a:lstStyle/>
-          <a:p>
-            <a:r>
-              <a:rPr sz="1000" b="1">
-                <a:solidFill>
-                  <a:srgbClr val="222222"/>
-                </a:solidFill>
-                <a:latin typeface="Calibri"/>
-              </a:rPr>
-              <a:t>Service Bus</a:t>
-            </a:r>
-          </a:p>
-        </p:txBody>
-      </p:sp>
-      <p:sp>
-        <p:nvSpPr>
-          <p:cNvPr id="53" name="Rounded Rectangle 52"/>
-          <p:cNvSpPr/>
-          <p:nvPr/>
-        </p:nvSpPr>
-        <p:spPr>
-          <a:xfrm>
-            <a:off x="4434840" y="5532120"/>
-            <a:ext cx="1645920" cy="640080"/>
-          </a:xfrm>
-          <a:prstGeom prst="roundRect">
-            <a:avLst>
-              <a:gd name="adj" fmla="val 10000"/>
-            </a:avLst>
-          </a:prstGeom>
-          <a:solidFill>
-            <a:srgbClr val="FFFFFF"/>
-          </a:solidFill>
-          <a:ln w="15875">
-            <a:solidFill>
-              <a:srgbClr val="C9B88E"/>
-            </a:solidFill>
-          </a:ln>
-          <a:effectLst>
-            <a:outerShdw blurRad="50800" dist="38100" dir="2700000" algn="tl" rotWithShape="0">
-              <a:srgbClr val="000000">
-                <a:alpha val="20000"/>
-              </a:srgbClr>
-            </a:outerShdw>
-          </a:effectLst>
-        </p:spPr>
-        <p:style>
-          <a:lnRef idx="1">
-            <a:schemeClr val="accent1"/>
-          </a:lnRef>
-          <a:fillRef idx="3">
-            <a:schemeClr val="accent1"/>
-          </a:fillRef>
-          <a:effectRef idx="2">
-            <a:schemeClr val="accent1"/>
-          </a:effectRef>
-          <a:fontRef idx="minor">
-            <a:schemeClr val="lt1"/>
-          </a:fontRef>
-        </p:style>
-        <p:txBody>
-          <a:bodyPr rtlCol="0" anchor="ctr"/>
-          <a:lstStyle/>
-          <a:p>
-            <a:pPr algn="ctr"/>
-          </a:p>
-        </p:txBody>
-      </p:sp>
-      <p:pic>
-        <p:nvPicPr>
-          <p:cNvPr id="54" name="Picture 53" descr="blob.png"/>
-          <p:cNvPicPr>
-            <a:picLocks noChangeAspect="1"/>
-          </p:cNvPicPr>
-          <p:nvPr/>
-        </p:nvPicPr>
-        <p:blipFill>
-          <a:blip r:embed="rId10"/>
-          <a:stretch>
-            <a:fillRect/>
-          </a:stretch>
-        </p:blipFill>
-        <p:spPr>
-          <a:xfrm>
-            <a:off x="4526280" y="5641848"/>
-            <a:ext cx="347472" cy="347472"/>
-          </a:xfrm>
-          <a:prstGeom prst="rect">
-            <a:avLst/>
-          </a:prstGeom>
-        </p:spPr>
-      </p:pic>
-      <p:sp>
-        <p:nvSpPr>
-          <p:cNvPr id="55" name="TextBox 54"/>
-          <p:cNvSpPr txBox="1"/>
-          <p:nvPr/>
-        </p:nvSpPr>
-        <p:spPr>
-          <a:xfrm>
-            <a:off x="4937760" y="5605272"/>
-            <a:ext cx="1051560" cy="530352"/>
-          </a:xfrm>
-          <a:prstGeom prst="rect">
-            <a:avLst/>
-          </a:prstGeom>
-          <a:noFill/>
-        </p:spPr>
-        <p:txBody>
-          <a:bodyPr wrap="square">
-            <a:spAutoFit/>
-          </a:bodyPr>
-          <a:lstStyle/>
-          <a:p>
-            <a:r>
-              <a:rPr sz="1000" b="1">
-                <a:solidFill>
-                  <a:srgbClr val="222222"/>
-                </a:solidFill>
-                <a:latin typeface="Calibri"/>
-              </a:rPr>
-              <a:t>Blob Storage</a:t>
-            </a:r>
-          </a:p>
-        </p:txBody>
-      </p:sp>
-      <p:sp>
-        <p:nvSpPr>
-          <p:cNvPr id="56" name="Rounded Rectangle 55"/>
-          <p:cNvSpPr/>
-          <p:nvPr/>
-        </p:nvSpPr>
-        <p:spPr>
-          <a:xfrm>
-            <a:off x="6217920" y="5532120"/>
-            <a:ext cx="1645920" cy="640080"/>
-          </a:xfrm>
-          <a:prstGeom prst="roundRect">
-            <a:avLst>
-              <a:gd name="adj" fmla="val 10000"/>
-            </a:avLst>
-          </a:prstGeom>
-          <a:solidFill>
-            <a:srgbClr val="FFFFFF"/>
-          </a:solidFill>
-          <a:ln w="15875">
-            <a:solidFill>
-              <a:srgbClr val="C9B88E"/>
-            </a:solidFill>
-          </a:ln>
-          <a:effectLst>
-            <a:outerShdw blurRad="50800" dist="38100" dir="2700000" algn="tl" rotWithShape="0">
-              <a:srgbClr val="000000">
-                <a:alpha val="20000"/>
-              </a:srgbClr>
-            </a:outerShdw>
-          </a:effectLst>
-        </p:spPr>
-        <p:style>
-          <a:lnRef idx="1">
-            <a:schemeClr val="accent1"/>
-          </a:lnRef>
-          <a:fillRef idx="3">
-            <a:schemeClr val="accent1"/>
-          </a:fillRef>
-          <a:effectRef idx="2">
-            <a:schemeClr val="accent1"/>
-          </a:effectRef>
-          <a:fontRef idx="minor">
-            <a:schemeClr val="lt1"/>
-          </a:fontRef>
-        </p:style>
-        <p:txBody>
-          <a:bodyPr rtlCol="0" anchor="ctr"/>
-          <a:lstStyle/>
-          <a:p>
-            <a:pPr algn="ctr"/>
-          </a:p>
-        </p:txBody>
-      </p:sp>
-      <p:pic>
-        <p:nvPicPr>
-          <p:cNvPr id="57" name="Picture 56" descr="postgres.png"/>
-          <p:cNvPicPr>
-            <a:picLocks noChangeAspect="1"/>
-          </p:cNvPicPr>
-          <p:nvPr/>
-        </p:nvPicPr>
-        <p:blipFill>
-          <a:blip r:embed="rId11"/>
-          <a:stretch>
-            <a:fillRect/>
-          </a:stretch>
-        </p:blipFill>
-        <p:spPr>
-          <a:xfrm>
-            <a:off x="6309360" y="5641848"/>
-            <a:ext cx="347472" cy="347472"/>
-          </a:xfrm>
-          <a:prstGeom prst="rect">
-            <a:avLst/>
-          </a:prstGeom>
-        </p:spPr>
-      </p:pic>
-      <p:sp>
-        <p:nvSpPr>
-          <p:cNvPr id="58" name="TextBox 57"/>
-          <p:cNvSpPr txBox="1"/>
-          <p:nvPr/>
-        </p:nvSpPr>
-        <p:spPr>
-          <a:xfrm>
-            <a:off x="6720840" y="5605272"/>
-            <a:ext cx="1051560" cy="530352"/>
-          </a:xfrm>
-          <a:prstGeom prst="rect">
-            <a:avLst/>
-          </a:prstGeom>
-          <a:noFill/>
-        </p:spPr>
-        <p:txBody>
-          <a:bodyPr wrap="square">
-            <a:spAutoFit/>
-          </a:bodyPr>
-          <a:lstStyle/>
-          <a:p>
-            <a:r>
-              <a:rPr sz="1000" b="1">
-                <a:solidFill>
-                  <a:srgbClr val="222222"/>
-                </a:solidFill>
-                <a:latin typeface="Calibri"/>
-              </a:rPr>
-              <a:t>Postgres DB</a:t>
-            </a:r>
-          </a:p>
-        </p:txBody>
-      </p:sp>
-      <p:sp>
-        <p:nvSpPr>
-          <p:cNvPr id="59" name="Rounded Rectangle 58"/>
-          <p:cNvSpPr/>
-          <p:nvPr/>
-        </p:nvSpPr>
-        <p:spPr>
-          <a:xfrm>
-            <a:off x="8001000" y="5532120"/>
-            <a:ext cx="1645920" cy="640080"/>
-          </a:xfrm>
-          <a:prstGeom prst="roundRect">
-            <a:avLst>
-              <a:gd name="adj" fmla="val 10000"/>
-            </a:avLst>
-          </a:prstGeom>
-          <a:solidFill>
-            <a:srgbClr val="FFFFFF"/>
-          </a:solidFill>
-          <a:ln w="15875">
-            <a:solidFill>
-              <a:srgbClr val="C9B88E"/>
-            </a:solidFill>
-          </a:ln>
-          <a:effectLst>
-            <a:outerShdw blurRad="50800" dist="38100" dir="2700000" algn="tl" rotWithShape="0">
-              <a:srgbClr val="000000">
-                <a:alpha val="20000"/>
-              </a:srgbClr>
-            </a:outerShdw>
-          </a:effectLst>
-        </p:spPr>
-        <p:style>
-          <a:lnRef idx="1">
-            <a:schemeClr val="accent1"/>
-          </a:lnRef>
-          <a:fillRef idx="3">
-            <a:schemeClr val="accent1"/>
-          </a:fillRef>
-          <a:effectRef idx="2">
-            <a:schemeClr val="accent1"/>
-          </a:effectRef>
-          <a:fontRef idx="minor">
-            <a:schemeClr val="lt1"/>
-          </a:fontRef>
-        </p:style>
-        <p:txBody>
-          <a:bodyPr rtlCol="0" anchor="ctr"/>
-          <a:lstStyle/>
-          <a:p>
-            <a:pPr algn="ctr"/>
-          </a:p>
-        </p:txBody>
-      </p:sp>
-      <p:pic>
-        <p:nvPicPr>
-          <p:cNvPr id="60" name="Picture 59" descr="redis.png"/>
-          <p:cNvPicPr>
-            <a:picLocks noChangeAspect="1"/>
-          </p:cNvPicPr>
-          <p:nvPr/>
-        </p:nvPicPr>
-        <p:blipFill>
-          <a:blip r:embed="rId12"/>
-          <a:stretch>
-            <a:fillRect/>
-          </a:stretch>
-        </p:blipFill>
-        <p:spPr>
-          <a:xfrm>
-            <a:off x="8092440" y="5641848"/>
-            <a:ext cx="347472" cy="347472"/>
-          </a:xfrm>
-          <a:prstGeom prst="rect">
-            <a:avLst/>
-          </a:prstGeom>
-        </p:spPr>
-      </p:pic>
-      <p:sp>
-        <p:nvSpPr>
-          <p:cNvPr id="61" name="TextBox 60"/>
-          <p:cNvSpPr txBox="1"/>
-          <p:nvPr/>
-        </p:nvSpPr>
-        <p:spPr>
-          <a:xfrm>
-            <a:off x="8503920" y="5605272"/>
-            <a:ext cx="1051560" cy="530352"/>
-          </a:xfrm>
-          <a:prstGeom prst="rect">
-            <a:avLst/>
-          </a:prstGeom>
-          <a:noFill/>
-        </p:spPr>
-        <p:txBody>
-          <a:bodyPr wrap="square">
-            <a:spAutoFit/>
-          </a:bodyPr>
-          <a:lstStyle/>
-          <a:p>
-            <a:r>
-              <a:rPr sz="1000" b="1">
-                <a:solidFill>
-                  <a:srgbClr val="222222"/>
-                </a:solidFill>
-                <a:latin typeface="Calibri"/>
-              </a:rPr>
-              <a:t>Redis Cache</a:t>
-            </a:r>
-          </a:p>
-        </p:txBody>
-      </p:sp>
-      <p:sp>
-        <p:nvSpPr>
-          <p:cNvPr id="62" name="Rounded Rectangle 61"/>
-          <p:cNvSpPr/>
-          <p:nvPr/>
-        </p:nvSpPr>
-        <p:spPr>
-          <a:xfrm>
-            <a:off x="9784080" y="5532120"/>
-            <a:ext cx="1645920" cy="640080"/>
-          </a:xfrm>
-          <a:prstGeom prst="roundRect">
-            <a:avLst>
-              <a:gd name="adj" fmla="val 10000"/>
-            </a:avLst>
-          </a:prstGeom>
-          <a:solidFill>
-            <a:srgbClr val="FFFFFF"/>
-          </a:solidFill>
-          <a:ln w="15875">
-            <a:solidFill>
-              <a:srgbClr val="C9B88E"/>
-            </a:solidFill>
-          </a:ln>
-          <a:effectLst>
-            <a:outerShdw blurRad="50800" dist="38100" dir="2700000" algn="tl" rotWithShape="0">
-              <a:srgbClr val="000000">
-                <a:alpha val="20000"/>
-              </a:srgbClr>
-            </a:outerShdw>
-          </a:effectLst>
-        </p:spPr>
-        <p:style>
-          <a:lnRef idx="1">
-            <a:schemeClr val="accent1"/>
-          </a:lnRef>
-          <a:fillRef idx="3">
-            <a:schemeClr val="accent1"/>
-          </a:fillRef>
-          <a:effectRef idx="2">
-            <a:schemeClr val="accent1"/>
-          </a:effectRef>
-          <a:fontRef idx="minor">
-            <a:schemeClr val="lt1"/>
-          </a:fontRef>
-        </p:style>
-        <p:txBody>
-          <a:bodyPr rtlCol="0" anchor="ctr"/>
-          <a:lstStyle/>
-          <a:p>
-            <a:pPr algn="ctr"/>
-          </a:p>
-        </p:txBody>
-      </p:sp>
-      <p:pic>
-        <p:nvPicPr>
-          <p:cNvPr id="63" name="Picture 62" descr="search.png"/>
-          <p:cNvPicPr>
-            <a:picLocks noChangeAspect="1"/>
-          </p:cNvPicPr>
-          <p:nvPr/>
-        </p:nvPicPr>
-        <p:blipFill>
-          <a:blip r:embed="rId13"/>
-          <a:stretch>
-            <a:fillRect/>
-          </a:stretch>
-        </p:blipFill>
-        <p:spPr>
-          <a:xfrm>
-            <a:off x="9875520" y="5641848"/>
-            <a:ext cx="347472" cy="347472"/>
-          </a:xfrm>
-          <a:prstGeom prst="rect">
-            <a:avLst/>
-          </a:prstGeom>
-        </p:spPr>
-      </p:pic>
-      <p:sp>
-        <p:nvSpPr>
-          <p:cNvPr id="64" name="TextBox 63"/>
-          <p:cNvSpPr txBox="1"/>
-          <p:nvPr/>
-        </p:nvSpPr>
-        <p:spPr>
-          <a:xfrm>
-            <a:off x="10287000" y="5605272"/>
-            <a:ext cx="1051560" cy="530352"/>
-          </a:xfrm>
-          <a:prstGeom prst="rect">
-            <a:avLst/>
-          </a:prstGeom>
-          <a:noFill/>
-        </p:spPr>
-        <p:txBody>
-          <a:bodyPr wrap="square">
-            <a:spAutoFit/>
-          </a:bodyPr>
-          <a:lstStyle/>
-          <a:p>
-            <a:r>
-              <a:rPr sz="1000" b="1">
-                <a:solidFill>
-                  <a:srgbClr val="222222"/>
-                </a:solidFill>
-                <a:latin typeface="Calibri"/>
-              </a:rPr>
-              <a:t>AI Search</a:t>
-            </a:r>
-          </a:p>
-        </p:txBody>
-      </p:sp>
-      <p:cxnSp>
-        <p:nvCxnSpPr>
-          <p:cNvPr id="65" name="Connector 64"/>
-          <p:cNvCxnSpPr/>
-          <p:nvPr/>
-        </p:nvCxnSpPr>
-        <p:spPr>
-          <a:xfrm>
-            <a:off x="2286000" y="3474720"/>
-            <a:ext cx="228600" cy="0"/>
-          </a:xfrm>
-          <a:prstGeom prst="line">
-            <a:avLst/>
-          </a:prstGeom>
-          <a:ln w="22225">
-            <a:solidFill>
-              <a:srgbClr val="444444"/>
-            </a:solidFill>
-            <a:tailEnd type="triangle" w="med" len="med"/>
-          </a:ln>
-        </p:spPr>
-        <p:style>
-          <a:lnRef idx="2">
-            <a:schemeClr val="accent1"/>
-          </a:lnRef>
-          <a:fillRef idx="0">
-            <a:schemeClr val="accent1"/>
-          </a:fillRef>
-          <a:effectRef idx="1">
-            <a:schemeClr val="accent1"/>
-          </a:effectRef>
-          <a:fontRef idx="minor">
-            <a:schemeClr val="tx1"/>
-          </a:fontRef>
-        </p:style>
-      </p:cxnSp>
-      <p:cxnSp>
-        <p:nvCxnSpPr>
-          <p:cNvPr id="66" name="Connector 65"/>
-          <p:cNvCxnSpPr/>
-          <p:nvPr/>
-        </p:nvCxnSpPr>
-        <p:spPr>
-          <a:xfrm flipV="1">
-            <a:off x="7543800" y="1097280"/>
-            <a:ext cx="274320" cy="1645920"/>
-          </a:xfrm>
-          <a:prstGeom prst="line">
-            <a:avLst/>
-          </a:prstGeom>
-          <a:ln w="22225">
-            <a:solidFill>
-              <a:srgbClr val="444444"/>
-            </a:solidFill>
-            <a:tailEnd type="triangle" w="med" len="med"/>
-          </a:ln>
-        </p:spPr>
-        <p:style>
-          <a:lnRef idx="2">
-            <a:schemeClr val="accent1"/>
-          </a:lnRef>
-          <a:fillRef idx="0">
-            <a:schemeClr val="accent1"/>
-          </a:fillRef>
-          <a:effectRef idx="1">
-            <a:schemeClr val="accent1"/>
-          </a:effectRef>
-          <a:fontRef idx="minor">
-            <a:schemeClr val="tx1"/>
-          </a:fontRef>
-        </p:style>
-      </p:cxnSp>
-      <p:sp>
-        <p:nvSpPr>
-          <p:cNvPr id="67" name="Rounded Rectangle 66"/>
-          <p:cNvSpPr/>
-          <p:nvPr/>
-        </p:nvSpPr>
-        <p:spPr>
-          <a:xfrm>
-            <a:off x="274320" y="6446520"/>
+            <a:off x="3840480" y="6446520"/>
             <a:ext cx="1417320" cy="320040"/>
           </a:xfrm>
           <a:prstGeom prst="roundRect">
@@ -5920,40 +5552,16 @@
           </a:p>
         </p:txBody>
       </p:sp>
-      <p:pic>
-        <p:nvPicPr>
-          <p:cNvPr id="68" name="Picture 67" descr="key-vault.png"/>
-          <p:cNvPicPr>
-            <a:picLocks noChangeAspect="1"/>
-          </p:cNvPicPr>
-          <p:nvPr/>
-        </p:nvPicPr>
-        <p:blipFill>
-          <a:blip r:embed="rId14"/>
-          <a:stretch>
-            <a:fillRect/>
-          </a:stretch>
-        </p:blipFill>
-        <p:spPr>
-          <a:xfrm>
-            <a:off x="365760" y="6556248"/>
-            <a:ext cx="347472" cy="347472"/>
-          </a:xfrm>
-          <a:prstGeom prst="rect">
-            <a:avLst/>
-          </a:prstGeom>
-        </p:spPr>
-      </p:pic>
-      <p:sp>
-        <p:nvSpPr>
-          <p:cNvPr id="69" name="TextBox 68"/>
+      <p:sp>
+        <p:nvSpPr>
+          <p:cNvPr id="53" name="TextBox 52"/>
           <p:cNvSpPr txBox="1"/>
           <p:nvPr/>
         </p:nvSpPr>
         <p:spPr>
           <a:xfrm>
-            <a:off x="777240" y="6519672"/>
-            <a:ext cx="822960" cy="210312"/>
+            <a:off x="3950208" y="6519672"/>
+            <a:ext cx="1216152" cy="210312"/>
           </a:xfrm>
           <a:prstGeom prst="rect">
             <a:avLst/>
@@ -5973,20 +5581,20 @@
                 </a:solidFill>
                 <a:latin typeface="Calibri"/>
               </a:rPr>
-              <a:t>Key Vault</a:t>
-            </a:r>
-          </a:p>
-        </p:txBody>
-      </p:sp>
-      <p:sp>
-        <p:nvSpPr>
-          <p:cNvPr id="70" name="Rounded Rectangle 69"/>
+              <a:t>Azure Monitor</a:t>
+            </a:r>
+          </a:p>
+        </p:txBody>
+      </p:sp>
+      <p:sp>
+        <p:nvSpPr>
+          <p:cNvPr id="54" name="Rounded Rectangle 53"/>
           <p:cNvSpPr/>
           <p:nvPr/>
         </p:nvSpPr>
         <p:spPr>
           <a:xfrm>
-            <a:off x="2011680" y="6446520"/>
+            <a:off x="5669280" y="6446520"/>
             <a:ext cx="1417320" cy="320040"/>
           </a:xfrm>
           <a:prstGeom prst="roundRect">
@@ -6032,40 +5640,16 @@
           </a:p>
         </p:txBody>
       </p:sp>
-      <p:pic>
-        <p:nvPicPr>
-          <p:cNvPr id="71" name="Picture 70" descr="entra.png"/>
-          <p:cNvPicPr>
-            <a:picLocks noChangeAspect="1"/>
-          </p:cNvPicPr>
-          <p:nvPr/>
-        </p:nvPicPr>
-        <p:blipFill>
-          <a:blip r:embed="rId8"/>
-          <a:stretch>
-            <a:fillRect/>
-          </a:stretch>
-        </p:blipFill>
-        <p:spPr>
-          <a:xfrm>
-            <a:off x="2103120" y="6556248"/>
-            <a:ext cx="347472" cy="347472"/>
-          </a:xfrm>
-          <a:prstGeom prst="rect">
-            <a:avLst/>
-          </a:prstGeom>
-        </p:spPr>
-      </p:pic>
-      <p:sp>
-        <p:nvSpPr>
-          <p:cNvPr id="72" name="TextBox 71"/>
+      <p:sp>
+        <p:nvSpPr>
+          <p:cNvPr id="55" name="TextBox 54"/>
           <p:cNvSpPr txBox="1"/>
           <p:nvPr/>
         </p:nvSpPr>
         <p:spPr>
           <a:xfrm>
-            <a:off x="2514600" y="6519672"/>
-            <a:ext cx="822960" cy="210312"/>
+            <a:off x="5779008" y="6519672"/>
+            <a:ext cx="1216152" cy="210312"/>
           </a:xfrm>
           <a:prstGeom prst="rect">
             <a:avLst/>
@@ -6085,20 +5669,20 @@
                 </a:solidFill>
                 <a:latin typeface="Calibri"/>
               </a:rPr>
-              <a:t>Entra Identity</a:t>
-            </a:r>
-          </a:p>
-        </p:txBody>
-      </p:sp>
-      <p:sp>
-        <p:nvSpPr>
-          <p:cNvPr id="73" name="Rounded Rectangle 72"/>
+              <a:t>Log Analytics</a:t>
+            </a:r>
+          </a:p>
+        </p:txBody>
+      </p:sp>
+      <p:sp>
+        <p:nvSpPr>
+          <p:cNvPr id="56" name="Rounded Rectangle 55"/>
           <p:cNvSpPr/>
           <p:nvPr/>
         </p:nvSpPr>
         <p:spPr>
           <a:xfrm>
-            <a:off x="3840480" y="6446520"/>
+            <a:off x="7406640" y="6446520"/>
             <a:ext cx="1417320" cy="320040"/>
           </a:xfrm>
           <a:prstGeom prst="roundRect">
@@ -6144,40 +5728,16 @@
           </a:p>
         </p:txBody>
       </p:sp>
-      <p:pic>
-        <p:nvPicPr>
-          <p:cNvPr id="74" name="Picture 73" descr="monitor.png"/>
-          <p:cNvPicPr>
-            <a:picLocks noChangeAspect="1"/>
-          </p:cNvPicPr>
-          <p:nvPr/>
-        </p:nvPicPr>
-        <p:blipFill>
-          <a:blip r:embed="rId15"/>
-          <a:stretch>
-            <a:fillRect/>
-          </a:stretch>
-        </p:blipFill>
-        <p:spPr>
-          <a:xfrm>
-            <a:off x="3931920" y="6556248"/>
-            <a:ext cx="347472" cy="347472"/>
-          </a:xfrm>
-          <a:prstGeom prst="rect">
-            <a:avLst/>
-          </a:prstGeom>
-        </p:spPr>
-      </p:pic>
-      <p:sp>
-        <p:nvSpPr>
-          <p:cNvPr id="75" name="TextBox 74"/>
+      <p:sp>
+        <p:nvSpPr>
+          <p:cNvPr id="57" name="TextBox 56"/>
           <p:cNvSpPr txBox="1"/>
           <p:nvPr/>
         </p:nvSpPr>
         <p:spPr>
           <a:xfrm>
-            <a:off x="4343400" y="6519672"/>
-            <a:ext cx="822960" cy="210312"/>
+            <a:off x="7516368" y="6519672"/>
+            <a:ext cx="1216152" cy="210312"/>
           </a:xfrm>
           <a:prstGeom prst="rect">
             <a:avLst/>
@@ -6197,20 +5757,20 @@
                 </a:solidFill>
                 <a:latin typeface="Calibri"/>
               </a:rPr>
-              <a:t>Azure Monitor</a:t>
-            </a:r>
-          </a:p>
-        </p:txBody>
-      </p:sp>
-      <p:sp>
-        <p:nvSpPr>
-          <p:cNvPr id="76" name="Rounded Rectangle 75"/>
+              <a:t>CI/CD (GitHub Actions)</a:t>
+            </a:r>
+          </a:p>
+        </p:txBody>
+      </p:sp>
+      <p:sp>
+        <p:nvSpPr>
+          <p:cNvPr id="58" name="Rounded Rectangle 57"/>
           <p:cNvSpPr/>
           <p:nvPr/>
         </p:nvSpPr>
         <p:spPr>
           <a:xfrm>
-            <a:off x="5669280" y="6446520"/>
+            <a:off x="9144000" y="6446520"/>
             <a:ext cx="1417320" cy="320040"/>
           </a:xfrm>
           <a:prstGeom prst="roundRect">
@@ -6258,13 +5818,13 @@
       </p:sp>
       <p:sp>
         <p:nvSpPr>
-          <p:cNvPr id="77" name="TextBox 76"/>
+          <p:cNvPr id="59" name="TextBox 58"/>
           <p:cNvSpPr txBox="1"/>
           <p:nvPr/>
         </p:nvSpPr>
         <p:spPr>
           <a:xfrm>
-            <a:off x="5779008" y="6519672"/>
+            <a:off x="9253728" y="6519672"/>
             <a:ext cx="1216152" cy="210312"/>
           </a:xfrm>
           <a:prstGeom prst="rect">
@@ -6285,20 +5845,20 @@
                 </a:solidFill>
                 <a:latin typeface="Calibri"/>
               </a:rPr>
-              <a:t>Log Analytics</a:t>
-            </a:r>
-          </a:p>
-        </p:txBody>
-      </p:sp>
-      <p:sp>
-        <p:nvSpPr>
-          <p:cNvPr id="78" name="Rounded Rectangle 77"/>
+              <a:t>Artifacts</a:t>
+            </a:r>
+          </a:p>
+        </p:txBody>
+      </p:sp>
+      <p:sp>
+        <p:nvSpPr>
+          <p:cNvPr id="60" name="Rounded Rectangle 59"/>
           <p:cNvSpPr/>
           <p:nvPr/>
         </p:nvSpPr>
         <p:spPr>
           <a:xfrm>
-            <a:off x="7406640" y="6446520"/>
+            <a:off x="10698480" y="6446520"/>
             <a:ext cx="1417320" cy="320040"/>
           </a:xfrm>
           <a:prstGeom prst="roundRect">
@@ -6346,183 +5906,7 @@
       </p:sp>
       <p:sp>
         <p:nvSpPr>
-          <p:cNvPr id="79" name="TextBox 78"/>
-          <p:cNvSpPr txBox="1"/>
-          <p:nvPr/>
-        </p:nvSpPr>
-        <p:spPr>
-          <a:xfrm>
-            <a:off x="7516368" y="6519672"/>
-            <a:ext cx="1216152" cy="210312"/>
-          </a:xfrm>
-          <a:prstGeom prst="rect">
-            <a:avLst/>
-          </a:prstGeom>
-          <a:noFill/>
-        </p:spPr>
-        <p:txBody>
-          <a:bodyPr wrap="square">
-            <a:spAutoFit/>
-          </a:bodyPr>
-          <a:lstStyle/>
-          <a:p>
-            <a:r>
-              <a:rPr sz="900" b="1">
-                <a:solidFill>
-                  <a:srgbClr val="222222"/>
-                </a:solidFill>
-                <a:latin typeface="Calibri"/>
-              </a:rPr>
-              <a:t>GitLab CI/CD</a:t>
-            </a:r>
-          </a:p>
-        </p:txBody>
-      </p:sp>
-      <p:sp>
-        <p:nvSpPr>
-          <p:cNvPr id="80" name="Rounded Rectangle 79"/>
-          <p:cNvSpPr/>
-          <p:nvPr/>
-        </p:nvSpPr>
-        <p:spPr>
-          <a:xfrm>
-            <a:off x="9144000" y="6446520"/>
-            <a:ext cx="1417320" cy="320040"/>
-          </a:xfrm>
-          <a:prstGeom prst="roundRect">
-            <a:avLst>
-              <a:gd name="adj" fmla="val 10000"/>
-            </a:avLst>
-          </a:prstGeom>
-          <a:solidFill>
-            <a:srgbClr val="EEEEEE"/>
-          </a:solidFill>
-          <a:ln w="15875">
-            <a:solidFill>
-              <a:srgbClr val="999999"/>
-            </a:solidFill>
-          </a:ln>
-          <a:effectLst>
-            <a:outerShdw blurRad="50800" dist="38100" dir="2700000" algn="tl" rotWithShape="0">
-              <a:srgbClr val="000000">
-                <a:alpha val="20000"/>
-              </a:srgbClr>
-            </a:outerShdw>
-          </a:effectLst>
-        </p:spPr>
-        <p:style>
-          <a:lnRef idx="1">
-            <a:schemeClr val="accent1"/>
-          </a:lnRef>
-          <a:fillRef idx="3">
-            <a:schemeClr val="accent1"/>
-          </a:fillRef>
-          <a:effectRef idx="2">
-            <a:schemeClr val="accent1"/>
-          </a:effectRef>
-          <a:fontRef idx="minor">
-            <a:schemeClr val="lt1"/>
-          </a:fontRef>
-        </p:style>
-        <p:txBody>
-          <a:bodyPr rtlCol="0" anchor="ctr"/>
-          <a:lstStyle/>
-          <a:p>
-            <a:pPr algn="ctr"/>
-          </a:p>
-        </p:txBody>
-      </p:sp>
-      <p:sp>
-        <p:nvSpPr>
-          <p:cNvPr id="81" name="TextBox 80"/>
-          <p:cNvSpPr txBox="1"/>
-          <p:nvPr/>
-        </p:nvSpPr>
-        <p:spPr>
-          <a:xfrm>
-            <a:off x="9253728" y="6519672"/>
-            <a:ext cx="1216152" cy="210312"/>
-          </a:xfrm>
-          <a:prstGeom prst="rect">
-            <a:avLst/>
-          </a:prstGeom>
-          <a:noFill/>
-        </p:spPr>
-        <p:txBody>
-          <a:bodyPr wrap="square">
-            <a:spAutoFit/>
-          </a:bodyPr>
-          <a:lstStyle/>
-          <a:p>
-            <a:r>
-              <a:rPr sz="900" b="1">
-                <a:solidFill>
-                  <a:srgbClr val="222222"/>
-                </a:solidFill>
-                <a:latin typeface="Calibri"/>
-              </a:rPr>
-              <a:t>Artifacts</a:t>
-            </a:r>
-          </a:p>
-        </p:txBody>
-      </p:sp>
-      <p:sp>
-        <p:nvSpPr>
-          <p:cNvPr id="82" name="Rounded Rectangle 81"/>
-          <p:cNvSpPr/>
-          <p:nvPr/>
-        </p:nvSpPr>
-        <p:spPr>
-          <a:xfrm>
-            <a:off x="10698480" y="6446520"/>
-            <a:ext cx="1417320" cy="320040"/>
-          </a:xfrm>
-          <a:prstGeom prst="roundRect">
-            <a:avLst>
-              <a:gd name="adj" fmla="val 10000"/>
-            </a:avLst>
-          </a:prstGeom>
-          <a:solidFill>
-            <a:srgbClr val="EEEEEE"/>
-          </a:solidFill>
-          <a:ln w="15875">
-            <a:solidFill>
-              <a:srgbClr val="999999"/>
-            </a:solidFill>
-          </a:ln>
-          <a:effectLst>
-            <a:outerShdw blurRad="50800" dist="38100" dir="2700000" algn="tl" rotWithShape="0">
-              <a:srgbClr val="000000">
-                <a:alpha val="20000"/>
-              </a:srgbClr>
-            </a:outerShdw>
-          </a:effectLst>
-        </p:spPr>
-        <p:style>
-          <a:lnRef idx="1">
-            <a:schemeClr val="accent1"/>
-          </a:lnRef>
-          <a:fillRef idx="3">
-            <a:schemeClr val="accent1"/>
-          </a:fillRef>
-          <a:effectRef idx="2">
-            <a:schemeClr val="accent1"/>
-          </a:effectRef>
-          <a:fontRef idx="minor">
-            <a:schemeClr val="lt1"/>
-          </a:fontRef>
-        </p:style>
-        <p:txBody>
-          <a:bodyPr rtlCol="0" anchor="ctr"/>
-          <a:lstStyle/>
-          <a:p>
-            <a:pPr algn="ctr"/>
-          </a:p>
-        </p:txBody>
-      </p:sp>
-      <p:sp>
-        <p:nvSpPr>
-          <p:cNvPr id="83" name="TextBox 82"/>
+          <p:cNvPr id="61" name="TextBox 60"/>
           <p:cNvSpPr txBox="1"/>
           <p:nvPr/>
         </p:nvSpPr>
@@ -6722,7 +6106,7 @@
                 </a:solidFill>
                 <a:latin typeface="Calibri"/>
               </a:rPr>
-              <a:t>Sell as backend-only: customers bring UI; they integrate via App Gateway / APIM.</a:t>
+              <a:t>Sell as backend-only: customers bring UI; they integrate via Front Door / APIM.</a:t>
             </a:r>
           </a:p>
           <a:p>
@@ -6733,7 +6117,7 @@
                 </a:solidFill>
                 <a:latin typeface="Calibri"/>
               </a:rPr>
-              <a:t>CAT 3 = MTS namespaces (API · Orchestrator · Workers).  CAT 1 = AI Hub via APIM.</a:t>
+              <a:t>CAT 3 = backend namespaces (API - Orchestrator - Workers).  CAT 1 = AI Hub via APIM.</a:t>
             </a:r>
           </a:p>
           <a:p>
@@ -6744,7 +6128,18 @@
                 </a:solidFill>
                 <a:latin typeface="Calibri"/>
               </a:rPr>
-              <a:t>Data plane: Service Bus · Blob · Postgres · Redis · AI Search with CMK.</a:t>
+              <a:t>Data plane: Service Bus - Blob - Azure Database for PostgreSQL - (optional) Cache for Redis, all CMK-encrypted.</a:t>
+            </a:r>
+          </a:p>
+          <a:p>
+            <a:r>
+              <a:rPr sz="1500" b="0">
+                <a:solidFill>
+                  <a:srgbClr val="222222"/>
+                </a:solidFill>
+                <a:latin typeface="Calibri"/>
+              </a:rPr>
+              <a:t>Every component on this board is an Azure service; there is no non-Azure infrastructure in this architecture.</a:t>
             </a:r>
           </a:p>
           <a:p>
